--- a/deck/LiveWell-Lab-Flow.pptx
+++ b/deck/LiveWell-Lab-Flow.pptx
@@ -25570,7 +25570,7 @@
                 </a:solidFill>
                 <a:latin typeface="Segoe UI"/>
               </a:rPr>
-              <a:t>Sign in to the Foundry portal with your hpb.labNN account and open the shared project.</a:t>
+              <a:t>Sign in to the Foundry portal with your own workshop account and open the shared project.</a:t>
             </a:r>
           </a:p>
         </p:txBody>

--- a/deck/LiveWell-Lab-Flow.pptx
+++ b/deck/LiveWell-Lab-Flow.pptx
@@ -1639,7 +1639,7 @@
           <a:lstStyle/>
           <a:p>
             <a:r>
-              <a:t>Lab 2: Guardrails, Evaluations &amp; Tracing. Objective, read from the lab page: Safety is measured, not assumed: apply guardrails, prove behaviour with evaluators, and make every decision auditable in a trace. Walk the steps on the left; the screenshot shows what success looks like. Close by reading the 'You learned' line aloud: that each safety layer (Prompt Shields, thresholds, blocklists, instructions) catches different things, that a stricter guardrail has a cost, and that guardrails, evaluator scores and traces are the evidence for safe deployment.</a:t>
+              <a:t>Lab 2: Guardrails, Evaluations &amp; Tracing. Objective, read from the lab page: Safety is measured, not assumed: apply guardrails, prove behaviour with evaluators, and make every decision auditable in a trace. Walk the steps on the left; the screenshot shows what success looks like. Close by reading the 'You learned' line aloud: that each safety layer (Prompt Shields, thresholds, blocklists, instructions) catches different things, that a stricter guardrail has a cost, and that guardrails, evaluator results and traces are the evidence for safe deployment.</a:t>
             </a:r>
           </a:p>
         </p:txBody>
@@ -13462,7 +13462,7 @@
                           </a:solidFill>
                           <a:latin typeface="Segoe UI"/>
                         </a:rPr>
-                        <a:t>Each safety layer (Prompt Shields, thresholds, blocklists, instructions) catches different things, that a stricter guardrail has a cost, and that guardrails, evaluator scores and traces are the evidence for safe deployment.</a:t>
+                        <a:t>Each safety layer (Prompt Shields, thresholds, blocklists, instructions) catches different things, that a stricter guardrail has a cost, and that guardrails, evaluator results and traces are the evidence for safe deployment.</a:t>
                       </a:r>
                     </a:p>
                   </a:txBody>
@@ -21707,25 +21707,7 @@
                 </a:solidFill>
                 <a:latin typeface="Segoe UI"/>
               </a:rPr>
-              <a:t> block; traces; </a:t>
-            </a:r>
-            <a:r>
-              <a:rPr sz="1150" i="0" b="0">
-                <a:solidFill>
-                  <a:srgbClr val="0B2E59"/>
-                </a:solidFill>
-                <a:latin typeface="Consolas"/>
-              </a:rPr>
-              <a:t>livewell-eval</a:t>
-            </a:r>
-            <a:r>
-              <a:rPr sz="1150" i="0" b="0">
-                <a:solidFill>
-                  <a:srgbClr val="333333"/>
-                </a:solidFill>
-                <a:latin typeface="Segoe UI"/>
-              </a:rPr>
-              <a:t> evaluations; baseline vs guarded version.</a:t>
+              <a:t> block; traces; the facilitator's pre-run evaluation (look-only); baseline vs guarded version.</a:t>
             </a:r>
           </a:p>
         </p:txBody>
@@ -29204,25 +29186,7 @@
                 </a:solidFill>
                 <a:latin typeface="Segoe UI"/>
               </a:rPr>
-              <a:t>Open a blocked and an allowed trace; run the </a:t>
-            </a:r>
-            <a:r>
-              <a:rPr sz="1080" i="0" b="0">
-                <a:solidFill>
-                  <a:srgbClr val="0B2E59"/>
-                </a:solidFill>
-                <a:latin typeface="Consolas"/>
-              </a:rPr>
-              <a:t>livewell-eval</a:t>
-            </a:r>
-            <a:r>
-              <a:rPr sz="1080" i="0" b="0">
-                <a:solidFill>
-                  <a:srgbClr val="333333"/>
-                </a:solidFill>
-                <a:latin typeface="Segoe UI"/>
-              </a:rPr>
-              <a:t> batch and compare versions.</a:t>
+              <a:t>Open a blocked and an allowed trace; read the facilitator's prepared evaluation and compare the versions (look only).</a:t>
             </a:r>
           </a:p>
         </p:txBody>
@@ -29475,7 +29439,7 @@
                 </a:solidFill>
                 <a:latin typeface="Segoe UI"/>
               </a:rPr>
-              <a:t> that each safety layer (Prompt Shields, thresholds, blocklists, instructions) catches different things, that a stricter guardrail has a cost, and that guardrails, evaluator scores and traces are the evidence for safe deployment.</a:t>
+              <a:t> that each safety layer (Prompt Shields, thresholds, blocklists, instructions) catches different things, that a stricter guardrail has a cost, and that guardrails, evaluator results and traces are the evidence for safe deployment.</a:t>
             </a:r>
           </a:p>
         </p:txBody>

--- a/deck/LiveWell-Lab-Flow.pptx
+++ b/deck/LiveWell-Lab-Flow.pptx
@@ -589,7 +589,7 @@
           <a:lstStyle/>
           <a:p>
             <a:r>
-              <a:t>Lab 3: Tools, MCP &amp; Memory: hyper-personalisation. Objective, read from the lab page: An agent that acts: personalise on governed data, take real actions with a human in the loop, delegate to specialists, and route each kind of question to the right tool. Walk the steps on the left; the screenshot shows what success looks like. Close by reading the 'You learned' line aloud: which work belongs in instructions, which belongs in tools, and where human approval belongs.</a:t>
+              <a:t>Lab 3: Tools, MCP &amp; Memory: hyper-personalisation. Objective, read from the lab page: An agent that acts: personalise on governed data, take real actions with a human in the loop, delegate to specialists, and route each kind of question to the right tool. Walk the steps on the left; use the illustration or text-only reference to explain the expected outcome. Close by reading the 'You learned' line aloud: which work belongs in instructions, which belongs in tools, and where human approval belongs.</a:t>
             </a:r>
           </a:p>
         </p:txBody>
@@ -659,7 +659,7 @@
           <a:lstStyle/>
           <a:p>
             <a:r>
-              <a:t>Fabric step: Population evidence with Fabric IQ. Objective, read from the lab page: An agent that acts: personalise on governed data, take real actions with a human in the loop, delegate to specialists, and route each kind of question to the right tool. Walk the steps on the left; the screenshot shows what success looks like. Close by reading the 'You learned' line aloud: that Fabric IQ adds governed population evidence to a personal answer, as long as the question sent to it stays aggregate.</a:t>
+              <a:t>Fabric step: Population evidence with Fabric IQ. Objective, read from the lab page: An agent that acts: personalise on governed data, take real actions with a human in the loop, delegate to specialists, and route each kind of question to the right tool. Walk the steps on the left; use the illustration or text-only reference to explain the expected outcome. Close by reading the 'You learned' line aloud: that Fabric IQ adds governed population evidence to a personal answer, as long as the question sent to it stays aggregate.</a:t>
             </a:r>
           </a:p>
         </p:txBody>
@@ -729,7 +729,7 @@
           <a:lstStyle/>
           <a:p>
             <a:r>
-              <a:t>Lab 4: Multi-agent &amp; Hosted deploy. Objective, read from the lab page: From playground to production: the same agent behind two doors (portal for people, endpoint for systems), governed by the same policy. Walk the steps on the left; the screenshot shows what success looks like. Close by reading the 'You learned' line aloud: what changes when an agent moves from playground to endpoint: RBAC, policy attachment, versioning and operational traces.</a:t>
+              <a:t>Lab 4: Multi-agent &amp; Hosted deploy. Objective, read from the lab page: From playground to production: the same agent behind two doors (portal for people, endpoint for systems), governed by the same policy. Walk the steps on the left; use the illustration or text-only reference to explain the expected outcome. Close by reading the 'You learned' line aloud: what changes when an agent moves from playground to endpoint: RBAC, policy attachment, versioning and operational traces.</a:t>
             </a:r>
           </a:p>
         </p:txBody>
@@ -869,7 +869,7 @@
           <a:lstStyle/>
           <a:p>
             <a:r>
-              <a:t>Bridge: Two IQs, one agent. Objective, read from the lab page: Know when to reach for Foundry IQ (documents and knowledge) versus Fabric IQ (governed business data and ontology), and how to connect them. Walk the steps on the left; the screenshot shows what success looks like. Close by reading the 'You learned' line aloud: how to choose the right grounding path before adding tools to an agent.</a:t>
+              <a:t>Bridge: Two IQs, one agent. Objective, read from the lab page: Know when to reach for Foundry IQ (documents and knowledge) versus Fabric IQ (governed business data and ontology), and how to connect them. Walk the steps on the left; use the illustration or text-only reference to explain the expected outcome. Close by reading the 'You learned' line aloud: how to choose the right grounding path before adding tools to an agent.</a:t>
             </a:r>
           </a:p>
         </p:txBody>
@@ -1499,7 +1499,7 @@
           <a:lstStyle/>
           <a:p>
             <a:r>
-              <a:t>Lab 0: Setup &amp; first agent. Objective, read from the lab page: A Foundry agent is a model plus instructions, and instructions alone can make it safe; every answer leaves a trace you can inspect. Walk the steps on the left; the screenshot shows what success looks like. Close by reading the 'You learned' line aloud: that a Foundry agent starts as model + instructions, and that every answer leaves a trace with the model, the instructions and the token counts.</a:t>
+              <a:t>Lab 0: Setup &amp; first agent. Objective, read from the lab page: A Foundry agent is a model plus instructions, and instructions alone can make it safe; every answer leaves a trace you can inspect. Walk the steps on the left; use the illustration or text-only reference to explain the expected outcome. Close by reading the 'You learned' line aloud: that a Foundry agent starts as model + instructions, and that every answer leaves a trace with the model, the instructions and the token counts.</a:t>
             </a:r>
           </a:p>
         </p:txBody>
@@ -1569,7 +1569,7 @@
           <a:lstStyle/>
           <a:p>
             <a:r>
-              <a:t>Lab 1: Agents &amp; Knowledge: Foundry IQ. Objective, read from the lab page: Ground every answer in curated knowledge with verifiable citations, never invent a source, and return machine-routable JSON. Walk the steps on the left; the screenshot shows what success looks like. Close by reading the 'You learned' line aloud: that retrieval is useful only when the agent is required to cite real sources and admit when the corpus is silent.</a:t>
+              <a:t>Lab 1: Agents &amp; Knowledge: Foundry IQ. Objective, read from the lab page: Ground every answer in curated knowledge with verifiable citations, never invent a source, and return machine-routable JSON. Walk the steps on the left; use the illustration or text-only reference to explain the expected outcome. Close by reading the 'You learned' line aloud: that retrieval is useful only when the agent is required to cite real sources and admit when the corpus is silent.</a:t>
             </a:r>
           </a:p>
         </p:txBody>
@@ -1639,7 +1639,7 @@
           <a:lstStyle/>
           <a:p>
             <a:r>
-              <a:t>Lab 2: Guardrails, Evaluations &amp; Tracing. Objective, read from the lab page: Safety is measured, not assumed: apply guardrails, prove behaviour with evaluators, and make every decision auditable in a trace. Walk the steps on the left; the screenshot shows what success looks like. Close by reading the 'You learned' line aloud: that each safety layer (Prompt Shields, thresholds, blocklists, instructions) catches different things, that a stricter guardrail has a cost, and that guardrails, evaluator scores and traces are the evidence for safe deployment.</a:t>
+              <a:t>Lab 2: Guardrails, Evaluations &amp; Tracing. Objective, read from the lab page: Safety is measured, not assumed: apply guardrails, prove behaviour with evaluators, and make every decision auditable in a trace. Walk the steps on the left; use the illustration or text-only reference to explain the expected outcome. Close by reading the 'You learned' line aloud: that each safety layer (Prompt Shields, thresholds, blocklists, instructions) catches different things, that a stricter guardrail has a cost, and that guardrails, evaluator scores and traces are the evidence for safe deployment.</a:t>
             </a:r>
           </a:p>
         </p:txBody>
@@ -6735,35 +6735,81 @@
           </a:p>
         </p:txBody>
       </p:sp>
-      <p:pic>
-        <p:nvPicPr>
-          <p:cNvPr id="27" name="Picture 26" descr="image.png"/>
-          <p:cNvPicPr>
-            <a:picLocks noChangeAspect="1"/>
-          </p:cNvPicPr>
-          <p:nvPr/>
-        </p:nvPicPr>
-        <p:blipFill>
-          <a:blip r:embed="rId3"/>
-          <a:stretch>
-            <a:fillRect/>
-          </a:stretch>
-        </p:blipFill>
-        <p:spPr>
-          <a:xfrm>
-            <a:off x="6583680" y="1844493"/>
-            <a:ext cx="5166360" cy="2931268"/>
+      <p:sp>
+        <p:nvSpPr>
+          <p:cNvPr id="27" name="Rectangle 26"/>
+          <p:cNvSpPr/>
+          <p:nvPr/>
+        </p:nvSpPr>
+        <p:spPr>
+          <a:xfrm>
+            <a:off x="6583680" y="1298448"/>
+            <a:ext cx="5166360" cy="4023360"/>
           </a:xfrm>
           <a:prstGeom prst="rect">
             <a:avLst/>
           </a:prstGeom>
+          <a:solidFill>
+            <a:srgbClr val="F4F8FA"/>
+          </a:solidFill>
           <a:ln w="12700">
             <a:solidFill>
               <a:srgbClr val="D7E2EA"/>
             </a:solidFill>
           </a:ln>
-        </p:spPr>
-      </p:pic>
+          <a:effectLst/>
+        </p:spPr>
+        <p:style>
+          <a:lnRef idx="1">
+            <a:schemeClr val="accent1"/>
+          </a:lnRef>
+          <a:fillRef idx="3">
+            <a:schemeClr val="accent1"/>
+          </a:fillRef>
+          <a:effectRef idx="2">
+            <a:schemeClr val="accent1"/>
+          </a:effectRef>
+          <a:fontRef idx="minor">
+            <a:schemeClr val="lt1"/>
+          </a:fontRef>
+        </p:style>
+        <p:txBody>
+          <a:bodyPr rtlCol="0" anchor="ctr" wrap="square" lIns="73152" rIns="73152" bIns="36576"/>
+          <a:lstStyle/>
+          <a:p>
+            <a:pPr algn="l">
+              <a:spcAft>
+                <a:spcPts val="200"/>
+              </a:spcAft>
+            </a:pPr>
+            <a:r>
+              <a:rPr sz="1100" i="0" b="1">
+                <a:solidFill>
+                  <a:srgbClr val="0B2E59"/>
+                </a:solidFill>
+                <a:latin typeface="Segoe UI"/>
+              </a:rPr>
+              <a:t>Text-only reference</a:t>
+            </a:r>
+          </a:p>
+          <a:p>
+            <a:pPr algn="l">
+              <a:spcAft>
+                <a:spcPts val="200"/>
+              </a:spcAft>
+            </a:pPr>
+            <a:r>
+              <a:rPr sz="1100" i="0" b="0">
+                <a:solidFill>
+                  <a:srgbClr val="333333"/>
+                </a:solidFill>
+                <a:latin typeface="Segoe UI"/>
+              </a:rPr>
+              <a:t>Follow the current Navigator steps and copy blocks. The older screenshot is awaiting a live refresh.</a:t>
+            </a:r>
+          </a:p>
+        </p:txBody>
+      </p:sp>
       <p:sp>
         <p:nvSpPr>
           <p:cNvPr id="28" name="TextBox 27"/>
@@ -8133,35 +8179,81 @@
           </a:p>
         </p:txBody>
       </p:sp>
-      <p:pic>
-        <p:nvPicPr>
-          <p:cNvPr id="25" name="Picture 24" descr="image.png"/>
-          <p:cNvPicPr>
-            <a:picLocks noChangeAspect="1"/>
-          </p:cNvPicPr>
-          <p:nvPr/>
-        </p:nvPicPr>
-        <p:blipFill>
-          <a:blip r:embed="rId3"/>
-          <a:stretch>
-            <a:fillRect/>
-          </a:stretch>
-        </p:blipFill>
-        <p:spPr>
-          <a:xfrm>
-            <a:off x="6583680" y="1331522"/>
-            <a:ext cx="5166360" cy="3957211"/>
+      <p:sp>
+        <p:nvSpPr>
+          <p:cNvPr id="25" name="Rectangle 24"/>
+          <p:cNvSpPr/>
+          <p:nvPr/>
+        </p:nvSpPr>
+        <p:spPr>
+          <a:xfrm>
+            <a:off x="6583680" y="1298448"/>
+            <a:ext cx="5166360" cy="4023360"/>
           </a:xfrm>
           <a:prstGeom prst="rect">
             <a:avLst/>
           </a:prstGeom>
+          <a:solidFill>
+            <a:srgbClr val="F4F8FA"/>
+          </a:solidFill>
           <a:ln w="12700">
             <a:solidFill>
               <a:srgbClr val="D7E2EA"/>
             </a:solidFill>
           </a:ln>
-        </p:spPr>
-      </p:pic>
+          <a:effectLst/>
+        </p:spPr>
+        <p:style>
+          <a:lnRef idx="1">
+            <a:schemeClr val="accent1"/>
+          </a:lnRef>
+          <a:fillRef idx="3">
+            <a:schemeClr val="accent1"/>
+          </a:fillRef>
+          <a:effectRef idx="2">
+            <a:schemeClr val="accent1"/>
+          </a:effectRef>
+          <a:fontRef idx="minor">
+            <a:schemeClr val="lt1"/>
+          </a:fontRef>
+        </p:style>
+        <p:txBody>
+          <a:bodyPr rtlCol="0" anchor="ctr" wrap="square" lIns="73152" rIns="73152" bIns="36576"/>
+          <a:lstStyle/>
+          <a:p>
+            <a:pPr algn="l">
+              <a:spcAft>
+                <a:spcPts val="200"/>
+              </a:spcAft>
+            </a:pPr>
+            <a:r>
+              <a:rPr sz="1100" i="0" b="1">
+                <a:solidFill>
+                  <a:srgbClr val="0B2E59"/>
+                </a:solidFill>
+                <a:latin typeface="Segoe UI"/>
+              </a:rPr>
+              <a:t>Text-only reference</a:t>
+            </a:r>
+          </a:p>
+          <a:p>
+            <a:pPr algn="l">
+              <a:spcAft>
+                <a:spcPts val="200"/>
+              </a:spcAft>
+            </a:pPr>
+            <a:r>
+              <a:rPr sz="1100" i="0" b="0">
+                <a:solidFill>
+                  <a:srgbClr val="333333"/>
+                </a:solidFill>
+                <a:latin typeface="Segoe UI"/>
+              </a:rPr>
+              <a:t>Follow the current Navigator steps and copy blocks. The older screenshot is awaiting a live refresh.</a:t>
+            </a:r>
+          </a:p>
+        </p:txBody>
+      </p:sp>
       <p:sp>
         <p:nvSpPr>
           <p:cNvPr id="26" name="TextBox 25"/>
@@ -8486,11 +8578,11 @@
             <a:avLst/>
           </a:prstGeom>
           <a:solidFill>
-            <a:srgbClr val="D7E2EA"/>
+            <a:srgbClr val="0B2E59"/>
           </a:solidFill>
           <a:ln w="12700">
             <a:solidFill>
-              <a:srgbClr val="D7E2EA"/>
+              <a:srgbClr val="0B2E59"/>
             </a:solidFill>
           </a:ln>
         </p:spPr>
@@ -8515,7 +8607,7 @@
             <a:pPr algn="ctr">
               <a:defRPr sz="1000" b="1">
                 <a:solidFill>
-                  <a:srgbClr val="0B2E59"/>
+                  <a:srgbClr val="FFFFFF"/>
                 </a:solidFill>
                 <a:latin typeface="Segoe UI"/>
               </a:defRPr>
@@ -8535,7 +8627,7 @@
         <p:spPr>
           <a:xfrm>
             <a:off x="1155801" y="896112"/>
-            <a:ext cx="1911095" cy="274320"/>
+            <a:ext cx="2384755" cy="274320"/>
           </a:xfrm>
           <a:prstGeom prst="roundRect">
             <a:avLst/>
@@ -8576,7 +8668,7 @@
               </a:defRPr>
             </a:pPr>
             <a:r>
-              <a:t>Part C · facilitator demo</a:t>
+              <a:t>Part C · browser hands-on + demo</a:t>
             </a:r>
           </a:p>
         </p:txBody>
@@ -8589,7 +8681,7 @@
         </p:nvSpPr>
         <p:spPr>
           <a:xfrm>
-            <a:off x="3140049" y="896112"/>
+            <a:off x="3613708" y="896112"/>
             <a:ext cx="490118" cy="274320"/>
           </a:xfrm>
           <a:prstGeom prst="roundRect">
@@ -8644,8 +8736,8 @@
         </p:nvSpPr>
         <p:spPr>
           <a:xfrm>
-            <a:off x="3703320" y="896112"/>
-            <a:ext cx="2249424" cy="274320"/>
+            <a:off x="4176979" y="896112"/>
+            <a:ext cx="2993745" cy="274320"/>
           </a:xfrm>
           <a:prstGeom prst="roundRect">
             <a:avLst/>
@@ -8686,7 +8778,7 @@
               </a:defRPr>
             </a:pPr>
             <a:r>
-              <a:t>Facilitator-led · Builder code</a:t>
+              <a:t>Navigator + Builder · facilitator deploys</a:t>
             </a:r>
           </a:p>
         </p:txBody>
@@ -8699,7 +8791,7 @@
         </p:nvSpPr>
         <p:spPr>
           <a:xfrm>
-            <a:off x="6025896" y="896112"/>
+            <a:off x="7243876" y="896112"/>
             <a:ext cx="1572768" cy="274320"/>
           </a:xfrm>
           <a:prstGeom prst="roundRect">
@@ -8894,7 +8986,7 @@
                 </a:solidFill>
                 <a:latin typeface="Segoe UI"/>
               </a:rPr>
-              <a:t>Two specialists answer; one reply comes back.</a:t>
+              <a:t>Sequential merges JSON; hand-off ends with Activity's answer.</a:t>
             </a:r>
           </a:p>
         </p:txBody>
@@ -9024,25 +9116,7 @@
                 </a:solidFill>
                 <a:latin typeface="Segoe UI"/>
               </a:rPr>
-              <a:t>The facilitator opens DevUI (</a:t>
-            </a:r>
-            <a:r>
-              <a:rPr sz="1080" i="0" b="0">
-                <a:solidFill>
-                  <a:srgbClr val="0B2E59"/>
-                </a:solidFill>
-                <a:latin typeface="Consolas"/>
-              </a:rPr>
-              <a:t>python demos/lab4-devui.py</a:t>
-            </a:r>
-            <a:r>
-              <a:rPr sz="1080" i="0" b="0">
-                <a:solidFill>
-                  <a:srgbClr val="333333"/>
-                </a:solidFill>
-                <a:latin typeface="Segoe UI"/>
-              </a:rPr>
-              <a:t>) with two workflows.</a:t>
+              <a:t>Open the browser DevUI using the address and token from the values sheet.</a:t>
             </a:r>
           </a:p>
         </p:txBody>
@@ -9248,7 +9322,7 @@
                 </a:solidFill>
                 <a:latin typeface="Segoe UI"/>
               </a:rPr>
-              <a:t>: the Coach triages and the model picks the route.</a:t>
+              <a:t>: the model picks the route, ending with Activity's answer.</a:t>
             </a:r>
           </a:p>
         </p:txBody>
@@ -12687,35 +12761,81 @@
           </a:p>
         </p:txBody>
       </p:sp>
-      <p:pic>
-        <p:nvPicPr>
-          <p:cNvPr id="27" name="Picture 26" descr="image.png"/>
-          <p:cNvPicPr>
-            <a:picLocks noChangeAspect="1"/>
-          </p:cNvPicPr>
-          <p:nvPr/>
-        </p:nvPicPr>
-        <p:blipFill>
-          <a:blip r:embed="rId3"/>
-          <a:stretch>
-            <a:fillRect/>
-          </a:stretch>
-        </p:blipFill>
-        <p:spPr>
-          <a:xfrm>
-            <a:off x="6583680" y="1807853"/>
-            <a:ext cx="5166360" cy="3004549"/>
+      <p:sp>
+        <p:nvSpPr>
+          <p:cNvPr id="27" name="Rectangle 26"/>
+          <p:cNvSpPr/>
+          <p:nvPr/>
+        </p:nvSpPr>
+        <p:spPr>
+          <a:xfrm>
+            <a:off x="6583680" y="1298448"/>
+            <a:ext cx="5166360" cy="4023360"/>
           </a:xfrm>
           <a:prstGeom prst="rect">
             <a:avLst/>
           </a:prstGeom>
+          <a:solidFill>
+            <a:srgbClr val="F4F8FA"/>
+          </a:solidFill>
           <a:ln w="12700">
             <a:solidFill>
               <a:srgbClr val="D7E2EA"/>
             </a:solidFill>
           </a:ln>
-        </p:spPr>
-      </p:pic>
+          <a:effectLst/>
+        </p:spPr>
+        <p:style>
+          <a:lnRef idx="1">
+            <a:schemeClr val="accent1"/>
+          </a:lnRef>
+          <a:fillRef idx="3">
+            <a:schemeClr val="accent1"/>
+          </a:fillRef>
+          <a:effectRef idx="2">
+            <a:schemeClr val="accent1"/>
+          </a:effectRef>
+          <a:fontRef idx="minor">
+            <a:schemeClr val="lt1"/>
+          </a:fontRef>
+        </p:style>
+        <p:txBody>
+          <a:bodyPr rtlCol="0" anchor="ctr" wrap="square" lIns="73152" rIns="73152" bIns="36576"/>
+          <a:lstStyle/>
+          <a:p>
+            <a:pPr algn="l">
+              <a:spcAft>
+                <a:spcPts val="200"/>
+              </a:spcAft>
+            </a:pPr>
+            <a:r>
+              <a:rPr sz="1100" i="0" b="1">
+                <a:solidFill>
+                  <a:srgbClr val="0B2E59"/>
+                </a:solidFill>
+                <a:latin typeface="Segoe UI"/>
+              </a:rPr>
+              <a:t>Text-only reference</a:t>
+            </a:r>
+          </a:p>
+          <a:p>
+            <a:pPr algn="l">
+              <a:spcAft>
+                <a:spcPts val="200"/>
+              </a:spcAft>
+            </a:pPr>
+            <a:r>
+              <a:rPr sz="1100" i="0" b="0">
+                <a:solidFill>
+                  <a:srgbClr val="333333"/>
+                </a:solidFill>
+                <a:latin typeface="Segoe UI"/>
+              </a:rPr>
+              <a:t>Follow the current Navigator steps and copy blocks. The older screenshot is awaiting a live refresh.</a:t>
+            </a:r>
+          </a:p>
+        </p:txBody>
+      </p:sp>
       <p:sp>
         <p:nvSpPr>
           <p:cNvPr id="28" name="TextBox 27"/>
@@ -20083,7 +20203,7 @@
               </a:defRPr>
             </a:pPr>
             <a:r>
-              <a:t>Part C · facilitator demo</a:t>
+              <a:t>Part C · browser hands-on + demo</a:t>
             </a:r>
           </a:p>
         </p:txBody>
@@ -20103,11 +20223,11 @@
             <a:avLst/>
           </a:prstGeom>
           <a:solidFill>
-            <a:srgbClr val="D7E2EA"/>
+            <a:srgbClr val="0B2E59"/>
           </a:solidFill>
           <a:ln w="12700">
             <a:solidFill>
-              <a:srgbClr val="D7E2EA"/>
+              <a:srgbClr val="0B2E59"/>
             </a:solidFill>
           </a:ln>
         </p:spPr>
@@ -20132,7 +20252,7 @@
             <a:pPr algn="ctr">
               <a:defRPr sz="1200" b="1">
                 <a:solidFill>
-                  <a:srgbClr val="0B2E59"/>
+                  <a:srgbClr val="FFFFFF"/>
                 </a:solidFill>
                 <a:latin typeface="Segoe UI"/>
               </a:defRPr>
@@ -20145,7 +20265,7 @@
             <a:pPr algn="ctr">
               <a:defRPr sz="1200" b="1">
                 <a:solidFill>
-                  <a:srgbClr val="0B2E59"/>
+                  <a:srgbClr val="FFFFFF"/>
                 </a:solidFill>
                 <a:latin typeface="Segoe UI"/>
               </a:defRPr>
@@ -20171,11 +20291,11 @@
             <a:avLst/>
           </a:prstGeom>
           <a:solidFill>
-            <a:srgbClr val="F4F8FA"/>
+            <a:srgbClr val="E7F4F6"/>
           </a:solidFill>
           <a:ln w="12700">
             <a:solidFill>
-              <a:srgbClr val="D7E2EA"/>
+              <a:srgbClr val="0F7C8C"/>
             </a:solidFill>
           </a:ln>
           <a:effectLst/>
@@ -26225,35 +26345,81 @@
           </a:p>
         </p:txBody>
       </p:sp>
-      <p:pic>
-        <p:nvPicPr>
-          <p:cNvPr id="27" name="Picture 26" descr="image.png"/>
-          <p:cNvPicPr>
-            <a:picLocks noChangeAspect="1"/>
-          </p:cNvPicPr>
-          <p:nvPr/>
-        </p:nvPicPr>
-        <p:blipFill>
-          <a:blip r:embed="rId3"/>
-          <a:stretch>
-            <a:fillRect/>
-          </a:stretch>
-        </p:blipFill>
-        <p:spPr>
-          <a:xfrm>
-            <a:off x="6583680" y="2175579"/>
-            <a:ext cx="5166360" cy="2269096"/>
+      <p:sp>
+        <p:nvSpPr>
+          <p:cNvPr id="27" name="Rectangle 26"/>
+          <p:cNvSpPr/>
+          <p:nvPr/>
+        </p:nvSpPr>
+        <p:spPr>
+          <a:xfrm>
+            <a:off x="6583680" y="1298448"/>
+            <a:ext cx="5166360" cy="4023360"/>
           </a:xfrm>
           <a:prstGeom prst="rect">
             <a:avLst/>
           </a:prstGeom>
+          <a:solidFill>
+            <a:srgbClr val="F4F8FA"/>
+          </a:solidFill>
           <a:ln w="12700">
             <a:solidFill>
               <a:srgbClr val="D7E2EA"/>
             </a:solidFill>
           </a:ln>
-        </p:spPr>
-      </p:pic>
+          <a:effectLst/>
+        </p:spPr>
+        <p:style>
+          <a:lnRef idx="1">
+            <a:schemeClr val="accent1"/>
+          </a:lnRef>
+          <a:fillRef idx="3">
+            <a:schemeClr val="accent1"/>
+          </a:fillRef>
+          <a:effectRef idx="2">
+            <a:schemeClr val="accent1"/>
+          </a:effectRef>
+          <a:fontRef idx="minor">
+            <a:schemeClr val="lt1"/>
+          </a:fontRef>
+        </p:style>
+        <p:txBody>
+          <a:bodyPr rtlCol="0" anchor="ctr" wrap="square" lIns="73152" rIns="73152" bIns="36576"/>
+          <a:lstStyle/>
+          <a:p>
+            <a:pPr algn="l">
+              <a:spcAft>
+                <a:spcPts val="200"/>
+              </a:spcAft>
+            </a:pPr>
+            <a:r>
+              <a:rPr sz="1100" i="0" b="1">
+                <a:solidFill>
+                  <a:srgbClr val="0B2E59"/>
+                </a:solidFill>
+                <a:latin typeface="Segoe UI"/>
+              </a:rPr>
+              <a:t>Text-only reference</a:t>
+            </a:r>
+          </a:p>
+          <a:p>
+            <a:pPr algn="l">
+              <a:spcAft>
+                <a:spcPts val="200"/>
+              </a:spcAft>
+            </a:pPr>
+            <a:r>
+              <a:rPr sz="1100" i="0" b="0">
+                <a:solidFill>
+                  <a:srgbClr val="333333"/>
+                </a:solidFill>
+                <a:latin typeface="Segoe UI"/>
+              </a:rPr>
+              <a:t>Follow the current Navigator steps and copy blocks. The older screenshot is awaiting a live refresh.</a:t>
+            </a:r>
+          </a:p>
+        </p:txBody>
+      </p:sp>
       <p:sp>
         <p:nvSpPr>
           <p:cNvPr id="28" name="TextBox 27"/>
@@ -27771,35 +27937,81 @@
           </a:p>
         </p:txBody>
       </p:sp>
-      <p:pic>
-        <p:nvPicPr>
-          <p:cNvPr id="27" name="Picture 26" descr="image.png"/>
-          <p:cNvPicPr>
-            <a:picLocks noChangeAspect="1"/>
-          </p:cNvPicPr>
-          <p:nvPr/>
-        </p:nvPicPr>
-        <p:blipFill>
-          <a:blip r:embed="rId3"/>
-          <a:stretch>
-            <a:fillRect/>
-          </a:stretch>
-        </p:blipFill>
-        <p:spPr>
-          <a:xfrm>
-            <a:off x="6625221" y="1298448"/>
-            <a:ext cx="5083277" cy="4023360"/>
+      <p:sp>
+        <p:nvSpPr>
+          <p:cNvPr id="27" name="Rectangle 26"/>
+          <p:cNvSpPr/>
+          <p:nvPr/>
+        </p:nvSpPr>
+        <p:spPr>
+          <a:xfrm>
+            <a:off x="6583680" y="1298448"/>
+            <a:ext cx="5166360" cy="4023360"/>
           </a:xfrm>
           <a:prstGeom prst="rect">
             <a:avLst/>
           </a:prstGeom>
+          <a:solidFill>
+            <a:srgbClr val="F4F8FA"/>
+          </a:solidFill>
           <a:ln w="12700">
             <a:solidFill>
               <a:srgbClr val="D7E2EA"/>
             </a:solidFill>
           </a:ln>
-        </p:spPr>
-      </p:pic>
+          <a:effectLst/>
+        </p:spPr>
+        <p:style>
+          <a:lnRef idx="1">
+            <a:schemeClr val="accent1"/>
+          </a:lnRef>
+          <a:fillRef idx="3">
+            <a:schemeClr val="accent1"/>
+          </a:fillRef>
+          <a:effectRef idx="2">
+            <a:schemeClr val="accent1"/>
+          </a:effectRef>
+          <a:fontRef idx="minor">
+            <a:schemeClr val="lt1"/>
+          </a:fontRef>
+        </p:style>
+        <p:txBody>
+          <a:bodyPr rtlCol="0" anchor="ctr" wrap="square" lIns="73152" rIns="73152" bIns="36576"/>
+          <a:lstStyle/>
+          <a:p>
+            <a:pPr algn="l">
+              <a:spcAft>
+                <a:spcPts val="200"/>
+              </a:spcAft>
+            </a:pPr>
+            <a:r>
+              <a:rPr sz="1100" i="0" b="1">
+                <a:solidFill>
+                  <a:srgbClr val="0B2E59"/>
+                </a:solidFill>
+                <a:latin typeface="Segoe UI"/>
+              </a:rPr>
+              <a:t>Text-only reference</a:t>
+            </a:r>
+          </a:p>
+          <a:p>
+            <a:pPr algn="l">
+              <a:spcAft>
+                <a:spcPts val="200"/>
+              </a:spcAft>
+            </a:pPr>
+            <a:r>
+              <a:rPr sz="1100" i="0" b="0">
+                <a:solidFill>
+                  <a:srgbClr val="333333"/>
+                </a:solidFill>
+                <a:latin typeface="Segoe UI"/>
+              </a:rPr>
+              <a:t>Follow the current Navigator steps and copy blocks. The older screenshot is awaiting a live refresh.</a:t>
+            </a:r>
+          </a:p>
+        </p:txBody>
+      </p:sp>
       <p:sp>
         <p:nvSpPr>
           <p:cNvPr id="28" name="TextBox 27"/>
@@ -29110,7 +29322,7 @@
                 </a:solidFill>
                 <a:latin typeface="Segoe UI"/>
               </a:rPr>
-              <a:t>Re-run the ladder: four outcomes change, including one benign false positive.</a:t>
+              <a:t>Re-run the ladder: three additional blocks, including one benign false positive.</a:t>
             </a:r>
           </a:p>
         </p:txBody>
@@ -29263,35 +29475,81 @@
           </a:p>
         </p:txBody>
       </p:sp>
-      <p:pic>
-        <p:nvPicPr>
-          <p:cNvPr id="28" name="Picture 27" descr="image.png"/>
-          <p:cNvPicPr>
-            <a:picLocks noChangeAspect="1"/>
-          </p:cNvPicPr>
-          <p:nvPr/>
-        </p:nvPicPr>
-        <p:blipFill>
-          <a:blip r:embed="rId3"/>
-          <a:stretch>
-            <a:fillRect/>
-          </a:stretch>
-        </p:blipFill>
-        <p:spPr>
-          <a:xfrm>
-            <a:off x="7233673" y="1554480"/>
-            <a:ext cx="3866372" cy="2286000"/>
+      <p:sp>
+        <p:nvSpPr>
+          <p:cNvPr id="28" name="Rectangle 27"/>
+          <p:cNvSpPr/>
+          <p:nvPr/>
+        </p:nvSpPr>
+        <p:spPr>
+          <a:xfrm>
+            <a:off x="6583680" y="1554480"/>
+            <a:ext cx="5166360" cy="2286000"/>
           </a:xfrm>
           <a:prstGeom prst="rect">
             <a:avLst/>
           </a:prstGeom>
+          <a:solidFill>
+            <a:srgbClr val="F4F8FA"/>
+          </a:solidFill>
           <a:ln w="12700">
             <a:solidFill>
               <a:srgbClr val="D7E2EA"/>
             </a:solidFill>
           </a:ln>
-        </p:spPr>
-      </p:pic>
+          <a:effectLst/>
+        </p:spPr>
+        <p:style>
+          <a:lnRef idx="1">
+            <a:schemeClr val="accent1"/>
+          </a:lnRef>
+          <a:fillRef idx="3">
+            <a:schemeClr val="accent1"/>
+          </a:fillRef>
+          <a:effectRef idx="2">
+            <a:schemeClr val="accent1"/>
+          </a:effectRef>
+          <a:fontRef idx="minor">
+            <a:schemeClr val="lt1"/>
+          </a:fontRef>
+        </p:style>
+        <p:txBody>
+          <a:bodyPr rtlCol="0" anchor="ctr" wrap="square" lIns="73152" rIns="73152" bIns="36576"/>
+          <a:lstStyle/>
+          <a:p>
+            <a:pPr algn="l">
+              <a:spcAft>
+                <a:spcPts val="200"/>
+              </a:spcAft>
+            </a:pPr>
+            <a:r>
+              <a:rPr sz="1100" i="0" b="1">
+                <a:solidFill>
+                  <a:srgbClr val="0B2E59"/>
+                </a:solidFill>
+                <a:latin typeface="Segoe UI"/>
+              </a:rPr>
+              <a:t>Text-only reference</a:t>
+            </a:r>
+          </a:p>
+          <a:p>
+            <a:pPr algn="l">
+              <a:spcAft>
+                <a:spcPts val="200"/>
+              </a:spcAft>
+            </a:pPr>
+            <a:r>
+              <a:rPr sz="1100" i="0" b="0">
+                <a:solidFill>
+                  <a:srgbClr val="333333"/>
+                </a:solidFill>
+                <a:latin typeface="Segoe UI"/>
+              </a:rPr>
+              <a:t>Follow the current Navigator steps and copy blocks. The older screenshot is awaiting a live refresh.</a:t>
+            </a:r>
+          </a:p>
+        </p:txBody>
+      </p:sp>
       <p:sp>
         <p:nvSpPr>
           <p:cNvPr id="29" name="TextBox 28"/>
@@ -29328,35 +29586,81 @@
           </a:p>
         </p:txBody>
       </p:sp>
-      <p:pic>
-        <p:nvPicPr>
-          <p:cNvPr id="30" name="Picture 29" descr="image.png"/>
-          <p:cNvPicPr>
-            <a:picLocks noChangeAspect="1"/>
-          </p:cNvPicPr>
-          <p:nvPr/>
-        </p:nvPicPr>
-        <p:blipFill>
-          <a:blip r:embed="rId4"/>
-          <a:stretch>
-            <a:fillRect/>
-          </a:stretch>
-        </p:blipFill>
-        <p:spPr>
-          <a:xfrm>
-            <a:off x="6768730" y="4206240"/>
-            <a:ext cx="4796259" cy="1143000"/>
+      <p:sp>
+        <p:nvSpPr>
+          <p:cNvPr id="30" name="Rectangle 29"/>
+          <p:cNvSpPr/>
+          <p:nvPr/>
+        </p:nvSpPr>
+        <p:spPr>
+          <a:xfrm>
+            <a:off x="6583680" y="4206240"/>
+            <a:ext cx="5166360" cy="1143000"/>
           </a:xfrm>
           <a:prstGeom prst="rect">
             <a:avLst/>
           </a:prstGeom>
+          <a:solidFill>
+            <a:srgbClr val="F4F8FA"/>
+          </a:solidFill>
           <a:ln w="12700">
             <a:solidFill>
               <a:srgbClr val="D7E2EA"/>
             </a:solidFill>
           </a:ln>
-        </p:spPr>
-      </p:pic>
+          <a:effectLst/>
+        </p:spPr>
+        <p:style>
+          <a:lnRef idx="1">
+            <a:schemeClr val="accent1"/>
+          </a:lnRef>
+          <a:fillRef idx="3">
+            <a:schemeClr val="accent1"/>
+          </a:fillRef>
+          <a:effectRef idx="2">
+            <a:schemeClr val="accent1"/>
+          </a:effectRef>
+          <a:fontRef idx="minor">
+            <a:schemeClr val="lt1"/>
+          </a:fontRef>
+        </p:style>
+        <p:txBody>
+          <a:bodyPr rtlCol="0" anchor="ctr" wrap="square" lIns="73152" rIns="73152" bIns="36576"/>
+          <a:lstStyle/>
+          <a:p>
+            <a:pPr algn="l">
+              <a:spcAft>
+                <a:spcPts val="200"/>
+              </a:spcAft>
+            </a:pPr>
+            <a:r>
+              <a:rPr sz="1100" i="0" b="1">
+                <a:solidFill>
+                  <a:srgbClr val="0B2E59"/>
+                </a:solidFill>
+                <a:latin typeface="Segoe UI"/>
+              </a:rPr>
+              <a:t>Text-only reference</a:t>
+            </a:r>
+          </a:p>
+          <a:p>
+            <a:pPr algn="l">
+              <a:spcAft>
+                <a:spcPts val="200"/>
+              </a:spcAft>
+            </a:pPr>
+            <a:r>
+              <a:rPr sz="1100" i="0" b="0">
+                <a:solidFill>
+                  <a:srgbClr val="333333"/>
+                </a:solidFill>
+                <a:latin typeface="Segoe UI"/>
+              </a:rPr>
+              <a:t>Follow the current Navigator steps and copy blocks. The older screenshot is awaiting a live refresh.</a:t>
+            </a:r>
+          </a:p>
+        </p:txBody>
+      </p:sp>
       <p:sp>
         <p:nvSpPr>
           <p:cNvPr id="31" name="TextBox 30"/>

--- a/deck/LiveWell-Lab-Flow.pptx
+++ b/deck/LiveWell-Lab-Flow.pptx
@@ -1429,7 +1429,7 @@
           <a:lstStyle/>
           <a:p>
             <a:r>
-              <a:t>Every lab page has the same sections in the same order, so participants always know where they are. Navigator is the portal path and Builder is the Python path; both reach the same checkpoint. The checkpoint is self-check only: participants compare their result with the collapsed Expected output block on the page. Nothing is submitted or graded.</a:t>
+              <a:t>Every lab page has the same sections in the same order, so participants always know where they are. Navigator is the portal path and Builder is the Python path; both reach the same checkpoint. The checkpoint is self-check only: participants compare their result with the collapsed Expected output block on the page. Nothing is submitted or graded. Lab 2 batch evaluation is a separate read-only code walkthrough; participants review the facilitator's completed comparison rather than starting their own batches.</a:t>
             </a:r>
           </a:p>
         </p:txBody>
@@ -21809,7 +21809,7 @@
                 </a:solidFill>
                 <a:latin typeface="Segoe UI"/>
               </a:rPr>
-              <a:t> policy + </a:t>
+              <a:t> + </a:t>
             </a:r>
             <a:r>
               <a:rPr sz="1150" i="0" b="0">
@@ -21827,25 +21827,7 @@
                 </a:solidFill>
                 <a:latin typeface="Segoe UI"/>
               </a:rPr>
-              <a:t> block; traces; </a:t>
-            </a:r>
-            <a:r>
-              <a:rPr sz="1150" i="0" b="0">
-                <a:solidFill>
-                  <a:srgbClr val="0B2E59"/>
-                </a:solidFill>
-                <a:latin typeface="Consolas"/>
-              </a:rPr>
-              <a:t>livewell-eval</a:t>
-            </a:r>
-            <a:r>
-              <a:rPr sz="1150" i="0" b="0">
-                <a:solidFill>
-                  <a:srgbClr val="333333"/>
-                </a:solidFill>
-                <a:latin typeface="Segoe UI"/>
-              </a:rPr>
-              <a:t> evaluations; baseline vs guarded version.</a:t>
+              <a:t>; traces; evaluation code walkthrough and shared baseline/guarded results.</a:t>
             </a:r>
           </a:p>
         </p:txBody>
@@ -24644,6 +24626,15 @@
               </a:rPr>
               <a:t>lab2_govern.py</a:t>
             </a:r>
+            <a:r>
+              <a:rPr sz="1150" i="0" b="0">
+                <a:solidFill>
+                  <a:srgbClr val="333333"/>
+                </a:solidFill>
+                <a:latin typeface="Segoe UI"/>
+              </a:rPr>
+              <a:t> (no batch evaluation)</a:t>
+            </a:r>
           </a:p>
           <a:p>
             <a:pPr algn="l">
@@ -29416,25 +29407,7 @@
                 </a:solidFill>
                 <a:latin typeface="Segoe UI"/>
               </a:rPr>
-              <a:t>Open a blocked and an allowed trace; run the </a:t>
-            </a:r>
-            <a:r>
-              <a:rPr sz="1080" i="0" b="0">
-                <a:solidFill>
-                  <a:srgbClr val="0B2E59"/>
-                </a:solidFill>
-                <a:latin typeface="Consolas"/>
-              </a:rPr>
-              <a:t>livewell-eval</a:t>
-            </a:r>
-            <a:r>
-              <a:rPr sz="1080" i="0" b="0">
-                <a:solidFill>
-                  <a:srgbClr val="333333"/>
-                </a:solidFill>
-                <a:latin typeface="Segoe UI"/>
-              </a:rPr>
-              <a:t> batch and compare versions.</a:t>
+              <a:t>Open blocked/allowed traces; read evaluation code and compare shared results. Do not run a batch.</a:t>
             </a:r>
           </a:p>
         </p:txBody>

--- a/deck/LiveWell-Lab-Flow.pptx
+++ b/deck/LiveWell-Lab-Flow.pptx
@@ -5884,7 +5884,7 @@
         <p:spPr>
           <a:xfrm>
             <a:off x="457200" y="2395728"/>
-            <a:ext cx="5897880" cy="731520"/>
+            <a:ext cx="5897880" cy="896112"/>
           </a:xfrm>
           <a:prstGeom prst="rect">
             <a:avLst/>
@@ -5934,7 +5934,7 @@
                 </a:solidFill>
                 <a:latin typeface="Segoe UI"/>
               </a:rPr>
-              <a:t> “It's hazy today. What can I do indoors near Woodlands, and can you sign me up?”</a:t>
+              <a:t> “It's hazy today. Look up my profile, use knowledge_base_retrieve to search the LiveWell guides for haze-safe activity advice, then use find_activities to list indoor community activities near Woodlands. Show me the options first.”</a:t>
             </a:r>
           </a:p>
           <a:p>
@@ -5950,7 +5950,7 @@
                 </a:solidFill>
                 <a:latin typeface="Segoe UI"/>
               </a:rPr>
-              <a:t>The sign-up is a real write, so it needs his approval.</a:t>
+              <a:t>The sign-up changes synthetic demo state, so it needs his approval.</a:t>
             </a:r>
           </a:p>
         </p:txBody>
@@ -5963,7 +5963,7 @@
         </p:nvSpPr>
         <p:spPr>
           <a:xfrm>
-            <a:off x="457200" y="3172968"/>
+            <a:off x="457200" y="3337560"/>
             <a:ext cx="5897880" cy="237744"/>
           </a:xfrm>
           <a:prstGeom prst="rect">
@@ -5999,7 +5999,7 @@
         </p:nvSpPr>
         <p:spPr>
           <a:xfrm>
-            <a:off x="502920" y="3465575"/>
+            <a:off x="502920" y="3630168"/>
             <a:ext cx="274320" cy="274320"/>
           </a:xfrm>
           <a:prstGeom prst="ellipse">
@@ -6054,8 +6054,8 @@
         </p:nvSpPr>
         <p:spPr>
           <a:xfrm>
-            <a:off x="868680" y="3428999"/>
-            <a:ext cx="5486400" cy="385572"/>
+            <a:off x="868680" y="3593591"/>
+            <a:ext cx="5486400" cy="358140"/>
           </a:xfrm>
           <a:prstGeom prst="rect">
             <a:avLst/>
@@ -6080,7 +6080,7 @@
                 </a:solidFill>
                 <a:latin typeface="Segoe UI"/>
               </a:rPr>
-              <a:t>Switch the model to </a:t>
+              <a:t>Switch to </a:t>
             </a:r>
             <a:r>
               <a:rPr sz="1080" i="0" b="0">
@@ -6098,7 +6098,7 @@
                 </a:solidFill>
                 <a:latin typeface="Segoe UI"/>
               </a:rPr>
-              <a:t>, then add the OpenAPI tool </a:t>
+              <a:t>; add </a:t>
             </a:r>
             <a:r>
               <a:rPr sz="1080" i="0" b="0">
@@ -6116,25 +6116,7 @@
                 </a:solidFill>
                 <a:latin typeface="Segoe UI"/>
               </a:rPr>
-              <a:t> (Builder: the </a:t>
-            </a:r>
-            <a:r>
-              <a:rPr sz="1080" i="0" b="0">
-                <a:solidFill>
-                  <a:srgbClr val="0B2E59"/>
-                </a:solidFill>
-                <a:latin typeface="Consolas"/>
-              </a:rPr>
-              <a:t>get_citizen_profile</a:t>
-            </a:r>
-            <a:r>
-              <a:rPr sz="1080" i="0" b="0">
-                <a:solidFill>
-                  <a:srgbClr val="333333"/>
-                </a:solidFill>
-                <a:latin typeface="Segoe UI"/>
-              </a:rPr>
-              <a:t> function).</a:t>
+              <a:t> using the prepared Anonymous connection and inline spec.</a:t>
             </a:r>
           </a:p>
         </p:txBody>
@@ -6147,7 +6129,7 @@
         </p:nvSpPr>
         <p:spPr>
           <a:xfrm>
-            <a:off x="502920" y="3851147"/>
+            <a:off x="502920" y="3988307"/>
             <a:ext cx="274320" cy="274320"/>
           </a:xfrm>
           <a:prstGeom prst="ellipse">
@@ -6202,8 +6184,8 @@
         </p:nvSpPr>
         <p:spPr>
           <a:xfrm>
-            <a:off x="868680" y="3814572"/>
-            <a:ext cx="5486400" cy="385572"/>
+            <a:off x="868680" y="3951732"/>
+            <a:ext cx="5486400" cy="358140"/>
           </a:xfrm>
           <a:prstGeom prst="rect">
             <a:avLst/>
@@ -6228,7 +6210,7 @@
                 </a:solidFill>
                 <a:latin typeface="Segoe UI"/>
               </a:rPr>
-              <a:t>Add </a:t>
+              <a:t>Add activities MCP; auto-approve only </a:t>
             </a:r>
             <a:r>
               <a:rPr sz="1080" i="0" b="0">
@@ -6237,7 +6219,7 @@
                 </a:solidFill>
                 <a:latin typeface="Consolas"/>
               </a:rPr>
-              <a:t>livewell-activities-mcp</a:t>
+              <a:t>find_activities</a:t>
             </a:r>
             <a:r>
               <a:rPr sz="1080" i="0" b="0">
@@ -6246,25 +6228,7 @@
                 </a:solidFill>
                 <a:latin typeface="Segoe UI"/>
               </a:rPr>
-              <a:t> and require approval for </a:t>
-            </a:r>
-            <a:r>
-              <a:rPr sz="1080" i="0" b="0">
-                <a:solidFill>
-                  <a:srgbClr val="0B2E59"/>
-                </a:solidFill>
-                <a:latin typeface="Consolas"/>
-              </a:rPr>
-              <a:t>register_interest</a:t>
-            </a:r>
-            <a:r>
-              <a:rPr sz="1080" i="0" b="0">
-                <a:solidFill>
-                  <a:srgbClr val="333333"/>
-                </a:solidFill>
-                <a:latin typeface="Segoe UI"/>
-              </a:rPr>
-              <a:t>.</a:t>
+              <a:t>, never registration.</a:t>
             </a:r>
           </a:p>
         </p:txBody>
@@ -6277,7 +6241,7 @@
         </p:nvSpPr>
         <p:spPr>
           <a:xfrm>
-            <a:off x="502920" y="4236720"/>
+            <a:off x="502920" y="4346448"/>
             <a:ext cx="274320" cy="274320"/>
           </a:xfrm>
           <a:prstGeom prst="ellipse">
@@ -6332,8 +6296,8 @@
         </p:nvSpPr>
         <p:spPr>
           <a:xfrm>
-            <a:off x="868680" y="4200144"/>
-            <a:ext cx="5486400" cy="385572"/>
+            <a:off x="868680" y="4309872"/>
+            <a:ext cx="5486400" cy="358140"/>
           </a:xfrm>
           <a:prstGeom prst="rect">
             <a:avLst/>
@@ -6352,49 +6316,40 @@
               </a:spcAft>
             </a:pPr>
             <a:r>
+              <a:rPr sz="1080" i="0" b="1">
+                <a:solidFill>
+                  <a:srgbClr val="333333"/>
+                </a:solidFill>
+                <a:latin typeface="Segoe UI"/>
+              </a:rPr>
+              <a:t>Memory → Add → Auto-create memory store</a:t>
+            </a:r>
+            <a:r>
               <a:rPr sz="1080" i="0" b="0">
                 <a:solidFill>
                   <a:srgbClr val="333333"/>
                 </a:solidFill>
                 <a:latin typeface="Segoe UI"/>
               </a:rPr>
-              <a:t>Enable </a:t>
-            </a:r>
-            <a:r>
-              <a:rPr sz="1080" i="0" b="1">
+              <a:t> (preview); append </a:t>
+            </a:r>
+            <a:r>
+              <a:rPr sz="1080" i="0" b="0">
+                <a:solidFill>
+                  <a:srgbClr val="0B2E59"/>
+                </a:solidFill>
+                <a:latin typeface="Consolas"/>
+              </a:rPr>
+              <a:t>tools</a:t>
+            </a:r>
+            <a:r>
+              <a:rPr sz="1080" i="0" b="0">
                 <a:solidFill>
                   <a:srgbClr val="333333"/>
                 </a:solidFill>
                 <a:latin typeface="Segoe UI"/>
               </a:rPr>
-              <a:t>Memory</a:t>
-            </a:r>
-            <a:r>
-              <a:rPr sz="1080" i="0" b="0">
-                <a:solidFill>
-                  <a:srgbClr val="333333"/>
-                </a:solidFill>
-                <a:latin typeface="Segoe UI"/>
-              </a:rPr>
-              <a:t> (preview) and append the </a:t>
-            </a:r>
-            <a:r>
-              <a:rPr sz="1080" i="0" b="0">
-                <a:solidFill>
-                  <a:srgbClr val="0B2E59"/>
-                </a:solidFill>
-                <a:latin typeface="Consolas"/>
-              </a:rPr>
-              <a:t>tools</a:t>
-            </a:r>
-            <a:r>
-              <a:rPr sz="1080" i="0" b="0">
-                <a:solidFill>
-                  <a:srgbClr val="333333"/>
-                </a:solidFill>
-                <a:latin typeface="Segoe UI"/>
-              </a:rPr>
-              <a:t> block.</a:t>
+              <a:t>, set the evidence schema, save.</a:t>
             </a:r>
           </a:p>
         </p:txBody>
@@ -6407,7 +6362,7 @@
         </p:nvSpPr>
         <p:spPr>
           <a:xfrm>
-            <a:off x="502920" y="4622292"/>
+            <a:off x="502920" y="4704588"/>
             <a:ext cx="274320" cy="274320"/>
           </a:xfrm>
           <a:prstGeom prst="ellipse">
@@ -6462,8 +6417,8 @@
         </p:nvSpPr>
         <p:spPr>
           <a:xfrm>
-            <a:off x="868680" y="4585716"/>
-            <a:ext cx="5486400" cy="385572"/>
+            <a:off x="868680" y="4668012"/>
+            <a:ext cx="5486400" cy="358140"/>
           </a:xfrm>
           <a:prstGeom prst="rect">
             <a:avLst/>
@@ -6488,25 +6443,7 @@
                 </a:solidFill>
                 <a:latin typeface="Segoe UI"/>
               </a:rPr>
-              <a:t>Send </a:t>
-            </a:r>
-            <a:r>
-              <a:rPr sz="1080" i="0" b="0">
-                <a:solidFill>
-                  <a:srgbClr val="0B2E59"/>
-                </a:solidFill>
-                <a:latin typeface="Consolas"/>
-              </a:rPr>
-              <a:t>lab3_profile_tailored</a:t>
-            </a:r>
-            <a:r>
-              <a:rPr sz="1080" i="0" b="0">
-                <a:solidFill>
-                  <a:srgbClr val="333333"/>
-                </a:solidFill>
-                <a:latin typeface="Segoe UI"/>
-              </a:rPr>
-              <a:t>: the advice uses Rahim's profile.</a:t>
+              <a:t>Run profile advice, then discovery: profile → knowledge retrieval → indoor activity options.</a:t>
             </a:r>
           </a:p>
         </p:txBody>
@@ -6519,7 +6456,7 @@
         </p:nvSpPr>
         <p:spPr>
           <a:xfrm>
-            <a:off x="502920" y="5007864"/>
+            <a:off x="502920" y="5062728"/>
             <a:ext cx="274320" cy="274320"/>
           </a:xfrm>
           <a:prstGeom prst="ellipse">
@@ -6574,8 +6511,8 @@
         </p:nvSpPr>
         <p:spPr>
           <a:xfrm>
-            <a:off x="868680" y="4971288"/>
-            <a:ext cx="5486400" cy="385572"/>
+            <a:off x="868680" y="5026152"/>
+            <a:ext cx="5486400" cy="358140"/>
           </a:xfrm>
           <a:prstGeom prst="rect">
             <a:avLst/>
@@ -6609,7 +6546,7 @@
                 </a:solidFill>
                 <a:latin typeface="Consolas"/>
               </a:rPr>
-              <a:t>lab3_hazy_indoor_signup</a:t>
+              <a:t>lab3_signup_confirm</a:t>
             </a:r>
             <a:r>
               <a:rPr sz="1080" i="0" b="0">
@@ -6618,7 +6555,7 @@
                 </a:solidFill>
                 <a:latin typeface="Segoe UI"/>
               </a:rPr>
-              <a:t>: indoor options near Woodlands, then </a:t>
+              <a:t>, inspect the proposed activity, then </a:t>
             </a:r>
             <a:r>
               <a:rPr sz="1080" i="0" b="1">
@@ -6627,7 +6564,7 @@
                 </a:solidFill>
                 <a:latin typeface="Segoe UI"/>
               </a:rPr>
-              <a:t>Approve</a:t>
+              <a:t>Approve once</a:t>
             </a:r>
             <a:r>
               <a:rPr sz="1080" i="0" b="0">
@@ -6636,7 +6573,7 @@
                 </a:solidFill>
                 <a:latin typeface="Segoe UI"/>
               </a:rPr>
-              <a:t> the sign-up.</a:t>
+              <a:t>.</a:t>
             </a:r>
           </a:p>
         </p:txBody>
@@ -6649,7 +6586,7 @@
         </p:nvSpPr>
         <p:spPr>
           <a:xfrm>
-            <a:off x="502920" y="5393436"/>
+            <a:off x="502920" y="5420867"/>
             <a:ext cx="274320" cy="274320"/>
           </a:xfrm>
           <a:prstGeom prst="ellipse">
@@ -6704,8 +6641,8 @@
         </p:nvSpPr>
         <p:spPr>
           <a:xfrm>
-            <a:off x="868680" y="5356860"/>
-            <a:ext cx="5486400" cy="385572"/>
+            <a:off x="868680" y="5384292"/>
+            <a:ext cx="5486400" cy="358140"/>
           </a:xfrm>
           <a:prstGeom prst="rect">
             <a:avLst/>
@@ -6730,86 +6667,40 @@
                 </a:solidFill>
                 <a:latin typeface="Segoe UI"/>
               </a:rPr>
-              <a:t>State a preference, start a new chat and check the coach remembers it.</a:t>
-            </a:r>
-          </a:p>
-        </p:txBody>
-      </p:sp>
-      <p:sp>
-        <p:nvSpPr>
-          <p:cNvPr id="27" name="Rectangle 26"/>
-          <p:cNvSpPr/>
-          <p:nvPr/>
-        </p:nvSpPr>
-        <p:spPr>
-          <a:xfrm>
-            <a:off x="6583680" y="1298448"/>
-            <a:ext cx="5166360" cy="4023360"/>
+              <a:t>State preferences, wait for memory, then use a new chat. Optional A2A: verify both actual calls.</a:t>
+            </a:r>
+          </a:p>
+        </p:txBody>
+      </p:sp>
+      <p:pic>
+        <p:nvPicPr>
+          <p:cNvPr id="27" name="Picture 26" descr="image.png"/>
+          <p:cNvPicPr>
+            <a:picLocks noChangeAspect="1"/>
+          </p:cNvPicPr>
+          <p:nvPr/>
+        </p:nvPicPr>
+        <p:blipFill>
+          <a:blip r:embed="rId3"/>
+          <a:stretch>
+            <a:fillRect/>
+          </a:stretch>
+        </p:blipFill>
+        <p:spPr>
+          <a:xfrm>
+            <a:off x="7025238" y="1298448"/>
+            <a:ext cx="4283242" cy="4023360"/>
           </a:xfrm>
           <a:prstGeom prst="rect">
             <a:avLst/>
           </a:prstGeom>
-          <a:solidFill>
-            <a:srgbClr val="F4F8FA"/>
-          </a:solidFill>
           <a:ln w="12700">
             <a:solidFill>
               <a:srgbClr val="D7E2EA"/>
             </a:solidFill>
           </a:ln>
-          <a:effectLst/>
-        </p:spPr>
-        <p:style>
-          <a:lnRef idx="1">
-            <a:schemeClr val="accent1"/>
-          </a:lnRef>
-          <a:fillRef idx="3">
-            <a:schemeClr val="accent1"/>
-          </a:fillRef>
-          <a:effectRef idx="2">
-            <a:schemeClr val="accent1"/>
-          </a:effectRef>
-          <a:fontRef idx="minor">
-            <a:schemeClr val="lt1"/>
-          </a:fontRef>
-        </p:style>
-        <p:txBody>
-          <a:bodyPr rtlCol="0" anchor="ctr" wrap="square" lIns="73152" rIns="73152" bIns="36576"/>
-          <a:lstStyle/>
-          <a:p>
-            <a:pPr algn="l">
-              <a:spcAft>
-                <a:spcPts val="200"/>
-              </a:spcAft>
-            </a:pPr>
-            <a:r>
-              <a:rPr sz="1100" i="0" b="1">
-                <a:solidFill>
-                  <a:srgbClr val="0B2E59"/>
-                </a:solidFill>
-                <a:latin typeface="Segoe UI"/>
-              </a:rPr>
-              <a:t>Text-only reference</a:t>
-            </a:r>
-          </a:p>
-          <a:p>
-            <a:pPr algn="l">
-              <a:spcAft>
-                <a:spcPts val="200"/>
-              </a:spcAft>
-            </a:pPr>
-            <a:r>
-              <a:rPr sz="1100" i="0" b="0">
-                <a:solidFill>
-                  <a:srgbClr val="333333"/>
-                </a:solidFill>
-                <a:latin typeface="Segoe UI"/>
-              </a:rPr>
-              <a:t>Follow the current Navigator steps and copy blocks. The older screenshot is awaiting a live refresh.</a:t>
-            </a:r>
-          </a:p>
-        </p:txBody>
-      </p:sp>
+        </p:spPr>
+      </p:pic>
       <p:sp>
         <p:nvSpPr>
           <p:cNvPr id="28" name="TextBox 27"/>
@@ -6844,25 +6735,7 @@
                 </a:solidFill>
                 <a:latin typeface="Segoe UI"/>
               </a:rPr>
-              <a:t>The write waits for you: </a:t>
-            </a:r>
-            <a:r>
-              <a:rPr sz="950" i="1" b="0">
-                <a:solidFill>
-                  <a:srgbClr val="0B2E59"/>
-                </a:solidFill>
-                <a:latin typeface="Consolas"/>
-              </a:rPr>
-              <a:t>register_interest</a:t>
-            </a:r>
-            <a:r>
-              <a:rPr sz="950" i="1" b="0">
-                <a:solidFill>
-                  <a:srgbClr val="333333"/>
-                </a:solidFill>
-                <a:latin typeface="Segoe UI"/>
-              </a:rPr>
-              <a:t> only runs after Approve.</a:t>
+              <a:t>After separate confirmation, inspect the proposed write and choose Approve once.</a:t>
             </a:r>
           </a:p>
         </p:txBody>
@@ -19913,7 +19786,7 @@
                 </a:solidFill>
                 <a:latin typeface="Segoe UI"/>
               </a:rPr>
-              <a:t>“It's hazy today. What can I do indoors near Woodlands, and can you sign me up?”</a:t>
+              <a:t>“It's hazy today. Look up my profile, use knowledge_base_retrieve to search the LiveWell guides for haze-safe activity advice, then use find_activities to list indoor community activities near Woodlands. Show me the options first.”</a:t>
             </a:r>
           </a:p>
         </p:txBody>
@@ -23291,7 +23164,7 @@
                           </a:solidFill>
                           <a:latin typeface="Segoe UI"/>
                         </a:rPr>
-                        <a:t>It's hazy today. What can I do indoors near Woodlands, and can you sign me up?</a:t>
+                        <a:t>It's hazy today. Look up my profile, use knowledge_base_retrieve to search the LiveWell guides for haze-safe activity advice, then use find_activities to list indoor community activities near Woodlands. Show me the options first.</a:t>
                       </a:r>
                     </a:p>
                   </a:txBody>
@@ -26336,81 +26209,35 @@
           </a:p>
         </p:txBody>
       </p:sp>
-      <p:sp>
-        <p:nvSpPr>
-          <p:cNvPr id="27" name="Rectangle 26"/>
-          <p:cNvSpPr/>
-          <p:nvPr/>
-        </p:nvSpPr>
-        <p:spPr>
-          <a:xfrm>
-            <a:off x="6583680" y="1298448"/>
-            <a:ext cx="5166360" cy="4023360"/>
+      <p:pic>
+        <p:nvPicPr>
+          <p:cNvPr id="27" name="Picture 26" descr="image.png"/>
+          <p:cNvPicPr>
+            <a:picLocks noChangeAspect="1"/>
+          </p:cNvPicPr>
+          <p:nvPr/>
+        </p:nvPicPr>
+        <p:blipFill>
+          <a:blip r:embed="rId3"/>
+          <a:stretch>
+            <a:fillRect/>
+          </a:stretch>
+        </p:blipFill>
+        <p:spPr>
+          <a:xfrm>
+            <a:off x="6583680" y="1436984"/>
+            <a:ext cx="5166360" cy="3746287"/>
           </a:xfrm>
           <a:prstGeom prst="rect">
             <a:avLst/>
           </a:prstGeom>
-          <a:solidFill>
-            <a:srgbClr val="F4F8FA"/>
-          </a:solidFill>
           <a:ln w="12700">
             <a:solidFill>
               <a:srgbClr val="D7E2EA"/>
             </a:solidFill>
           </a:ln>
-          <a:effectLst/>
-        </p:spPr>
-        <p:style>
-          <a:lnRef idx="1">
-            <a:schemeClr val="accent1"/>
-          </a:lnRef>
-          <a:fillRef idx="3">
-            <a:schemeClr val="accent1"/>
-          </a:fillRef>
-          <a:effectRef idx="2">
-            <a:schemeClr val="accent1"/>
-          </a:effectRef>
-          <a:fontRef idx="minor">
-            <a:schemeClr val="lt1"/>
-          </a:fontRef>
-        </p:style>
-        <p:txBody>
-          <a:bodyPr rtlCol="0" anchor="ctr" wrap="square" lIns="73152" rIns="73152" bIns="36576"/>
-          <a:lstStyle/>
-          <a:p>
-            <a:pPr algn="l">
-              <a:spcAft>
-                <a:spcPts val="200"/>
-              </a:spcAft>
-            </a:pPr>
-            <a:r>
-              <a:rPr sz="1100" i="0" b="1">
-                <a:solidFill>
-                  <a:srgbClr val="0B2E59"/>
-                </a:solidFill>
-                <a:latin typeface="Segoe UI"/>
-              </a:rPr>
-              <a:t>Text-only reference</a:t>
-            </a:r>
-          </a:p>
-          <a:p>
-            <a:pPr algn="l">
-              <a:spcAft>
-                <a:spcPts val="200"/>
-              </a:spcAft>
-            </a:pPr>
-            <a:r>
-              <a:rPr sz="1100" i="0" b="0">
-                <a:solidFill>
-                  <a:srgbClr val="333333"/>
-                </a:solidFill>
-                <a:latin typeface="Segoe UI"/>
-              </a:rPr>
-              <a:t>Follow the current Navigator steps and copy blocks. The older screenshot is awaiting a live refresh.</a:t>
-            </a:r>
-          </a:p>
-        </p:txBody>
-      </p:sp>
+        </p:spPr>
+      </p:pic>
       <p:sp>
         <p:nvSpPr>
           <p:cNvPr id="28" name="TextBox 27"/>
@@ -26445,25 +26272,7 @@
                 </a:solidFill>
                 <a:latin typeface="Segoe UI"/>
               </a:rPr>
-              <a:t>One chat span under the agent, no tool calls, and the </a:t>
-            </a:r>
-            <a:r>
-              <a:rPr sz="950" i="1" b="0">
-                <a:solidFill>
-                  <a:srgbClr val="0B2E59"/>
-                </a:solidFill>
-                <a:latin typeface="Consolas"/>
-              </a:rPr>
-              <a:t>base</a:t>
-            </a:r>
-            <a:r>
-              <a:rPr sz="950" i="1" b="0">
-                <a:solidFill>
-                  <a:srgbClr val="333333"/>
-                </a:solidFill>
-                <a:latin typeface="Segoe UI"/>
-              </a:rPr>
-              <a:t> block as the system message.</a:t>
+              <a:t>One chat span per answer, no tool calls; the conversation includes the greeting and refusal.</a:t>
             </a:r>
           </a:p>
         </p:txBody>
@@ -27291,7 +27100,7 @@
                 </a:solidFill>
                 <a:latin typeface="Segoe UI"/>
               </a:rPr>
-              <a:t>Knowledge → Add → Connect to Foundry IQ</a:t>
+              <a:t>Knowledge → Add → Available knowledge bases</a:t>
             </a:r>
             <a:r>
               <a:rPr sz="1080" i="0" b="0">
@@ -27300,7 +27109,7 @@
                 </a:solidFill>
                 <a:latin typeface="Segoe UI"/>
               </a:rPr>
-              <a:t> and pick </a:t>
+              <a:t>: pick </a:t>
             </a:r>
             <a:r>
               <a:rPr sz="1080" i="0" b="0">
@@ -27310,6 +27119,24 @@
                 <a:latin typeface="Consolas"/>
               </a:rPr>
               <a:t>livewell-guides-kb</a:t>
+            </a:r>
+            <a:r>
+              <a:rPr sz="1080" i="0" b="0">
+                <a:solidFill>
+                  <a:srgbClr val="333333"/>
+                </a:solidFill>
+                <a:latin typeface="Segoe UI"/>
+              </a:rPr>
+              <a:t> via </a:t>
+            </a:r>
+            <a:r>
+              <a:rPr sz="1080" i="0" b="0">
+                <a:solidFill>
+                  <a:srgbClr val="0B2E59"/>
+                </a:solidFill>
+                <a:latin typeface="Consolas"/>
+              </a:rPr>
+              <a:t>livewell-guides-kb-mcp</a:t>
             </a:r>
             <a:r>
               <a:rPr sz="1080" i="0" b="0">
@@ -27928,81 +27755,35 @@
           </a:p>
         </p:txBody>
       </p:sp>
-      <p:sp>
-        <p:nvSpPr>
-          <p:cNvPr id="27" name="Rectangle 26"/>
-          <p:cNvSpPr/>
-          <p:nvPr/>
-        </p:nvSpPr>
-        <p:spPr>
-          <a:xfrm>
-            <a:off x="6583680" y="1298448"/>
-            <a:ext cx="5166360" cy="4023360"/>
+      <p:pic>
+        <p:nvPicPr>
+          <p:cNvPr id="27" name="Picture 26" descr="image.png"/>
+          <p:cNvPicPr>
+            <a:picLocks noChangeAspect="1"/>
+          </p:cNvPicPr>
+          <p:nvPr/>
+        </p:nvPicPr>
+        <p:blipFill>
+          <a:blip r:embed="rId3"/>
+          <a:stretch>
+            <a:fillRect/>
+          </a:stretch>
+        </p:blipFill>
+        <p:spPr>
+          <a:xfrm>
+            <a:off x="7628719" y="1298448"/>
+            <a:ext cx="3076280" cy="4023360"/>
           </a:xfrm>
           <a:prstGeom prst="rect">
             <a:avLst/>
           </a:prstGeom>
-          <a:solidFill>
-            <a:srgbClr val="F4F8FA"/>
-          </a:solidFill>
           <a:ln w="12700">
             <a:solidFill>
               <a:srgbClr val="D7E2EA"/>
             </a:solidFill>
           </a:ln>
-          <a:effectLst/>
-        </p:spPr>
-        <p:style>
-          <a:lnRef idx="1">
-            <a:schemeClr val="accent1"/>
-          </a:lnRef>
-          <a:fillRef idx="3">
-            <a:schemeClr val="accent1"/>
-          </a:fillRef>
-          <a:effectRef idx="2">
-            <a:schemeClr val="accent1"/>
-          </a:effectRef>
-          <a:fontRef idx="minor">
-            <a:schemeClr val="lt1"/>
-          </a:fontRef>
-        </p:style>
-        <p:txBody>
-          <a:bodyPr rtlCol="0" anchor="ctr" wrap="square" lIns="73152" rIns="73152" bIns="36576"/>
-          <a:lstStyle/>
-          <a:p>
-            <a:pPr algn="l">
-              <a:spcAft>
-                <a:spcPts val="200"/>
-              </a:spcAft>
-            </a:pPr>
-            <a:r>
-              <a:rPr sz="1100" i="0" b="1">
-                <a:solidFill>
-                  <a:srgbClr val="0B2E59"/>
-                </a:solidFill>
-                <a:latin typeface="Segoe UI"/>
-              </a:rPr>
-              <a:t>Text-only reference</a:t>
-            </a:r>
-          </a:p>
-          <a:p>
-            <a:pPr algn="l">
-              <a:spcAft>
-                <a:spcPts val="200"/>
-              </a:spcAft>
-            </a:pPr>
-            <a:r>
-              <a:rPr sz="1100" i="0" b="0">
-                <a:solidFill>
-                  <a:srgbClr val="333333"/>
-                </a:solidFill>
-                <a:latin typeface="Segoe UI"/>
-              </a:rPr>
-              <a:t>Follow the current Navigator steps and copy blocks. The older screenshot is awaiting a live refresh.</a:t>
-            </a:r>
-          </a:p>
-        </p:txBody>
-      </p:sp>
+        </p:spPr>
+      </p:pic>
       <p:sp>
         <p:nvSpPr>
           <p:cNvPr id="28" name="TextBox 27"/>
@@ -29448,81 +29229,35 @@
           </a:p>
         </p:txBody>
       </p:sp>
-      <p:sp>
-        <p:nvSpPr>
-          <p:cNvPr id="28" name="Rectangle 27"/>
-          <p:cNvSpPr/>
-          <p:nvPr/>
-        </p:nvSpPr>
-        <p:spPr>
-          <a:xfrm>
-            <a:off x="6583680" y="1554480"/>
-            <a:ext cx="5166360" cy="2286000"/>
+      <p:pic>
+        <p:nvPicPr>
+          <p:cNvPr id="28" name="Picture 27" descr="image.png"/>
+          <p:cNvPicPr>
+            <a:picLocks noChangeAspect="1"/>
+          </p:cNvPicPr>
+          <p:nvPr/>
+        </p:nvPicPr>
+        <p:blipFill>
+          <a:blip r:embed="rId3"/>
+          <a:stretch>
+            <a:fillRect/>
+          </a:stretch>
+        </p:blipFill>
+        <p:spPr>
+          <a:xfrm>
+            <a:off x="7995845" y="1554480"/>
+            <a:ext cx="2342029" cy="2286000"/>
           </a:xfrm>
           <a:prstGeom prst="rect">
             <a:avLst/>
           </a:prstGeom>
-          <a:solidFill>
-            <a:srgbClr val="F4F8FA"/>
-          </a:solidFill>
           <a:ln w="12700">
             <a:solidFill>
               <a:srgbClr val="D7E2EA"/>
             </a:solidFill>
           </a:ln>
-          <a:effectLst/>
-        </p:spPr>
-        <p:style>
-          <a:lnRef idx="1">
-            <a:schemeClr val="accent1"/>
-          </a:lnRef>
-          <a:fillRef idx="3">
-            <a:schemeClr val="accent1"/>
-          </a:fillRef>
-          <a:effectRef idx="2">
-            <a:schemeClr val="accent1"/>
-          </a:effectRef>
-          <a:fontRef idx="minor">
-            <a:schemeClr val="lt1"/>
-          </a:fontRef>
-        </p:style>
-        <p:txBody>
-          <a:bodyPr rtlCol="0" anchor="ctr" wrap="square" lIns="73152" rIns="73152" bIns="36576"/>
-          <a:lstStyle/>
-          <a:p>
-            <a:pPr algn="l">
-              <a:spcAft>
-                <a:spcPts val="200"/>
-              </a:spcAft>
-            </a:pPr>
-            <a:r>
-              <a:rPr sz="1100" i="0" b="1">
-                <a:solidFill>
-                  <a:srgbClr val="0B2E59"/>
-                </a:solidFill>
-                <a:latin typeface="Segoe UI"/>
-              </a:rPr>
-              <a:t>Text-only reference</a:t>
-            </a:r>
-          </a:p>
-          <a:p>
-            <a:pPr algn="l">
-              <a:spcAft>
-                <a:spcPts val="200"/>
-              </a:spcAft>
-            </a:pPr>
-            <a:r>
-              <a:rPr sz="1100" i="0" b="0">
-                <a:solidFill>
-                  <a:srgbClr val="333333"/>
-                </a:solidFill>
-                <a:latin typeface="Segoe UI"/>
-              </a:rPr>
-              <a:t>Follow the current Navigator steps and copy blocks. The older screenshot is awaiting a live refresh.</a:t>
-            </a:r>
-          </a:p>
-        </p:txBody>
-      </p:sp>
+        </p:spPr>
+      </p:pic>
       <p:sp>
         <p:nvSpPr>
           <p:cNvPr id="29" name="TextBox 28"/>
@@ -29559,81 +29294,35 @@
           </a:p>
         </p:txBody>
       </p:sp>
-      <p:sp>
-        <p:nvSpPr>
-          <p:cNvPr id="30" name="Rectangle 29"/>
-          <p:cNvSpPr/>
-          <p:nvPr/>
-        </p:nvSpPr>
-        <p:spPr>
-          <a:xfrm>
-            <a:off x="6583680" y="4206240"/>
-            <a:ext cx="5166360" cy="1143000"/>
+      <p:pic>
+        <p:nvPicPr>
+          <p:cNvPr id="30" name="Picture 29" descr="image.png"/>
+          <p:cNvPicPr>
+            <a:picLocks noChangeAspect="1"/>
+          </p:cNvPicPr>
+          <p:nvPr/>
+        </p:nvPicPr>
+        <p:blipFill>
+          <a:blip r:embed="rId4"/>
+          <a:stretch>
+            <a:fillRect/>
+          </a:stretch>
+        </p:blipFill>
+        <p:spPr>
+          <a:xfrm>
+            <a:off x="7710231" y="4206240"/>
+            <a:ext cx="2913256" cy="1143000"/>
           </a:xfrm>
           <a:prstGeom prst="rect">
             <a:avLst/>
           </a:prstGeom>
-          <a:solidFill>
-            <a:srgbClr val="F4F8FA"/>
-          </a:solidFill>
           <a:ln w="12700">
             <a:solidFill>
               <a:srgbClr val="D7E2EA"/>
             </a:solidFill>
           </a:ln>
-          <a:effectLst/>
-        </p:spPr>
-        <p:style>
-          <a:lnRef idx="1">
-            <a:schemeClr val="accent1"/>
-          </a:lnRef>
-          <a:fillRef idx="3">
-            <a:schemeClr val="accent1"/>
-          </a:fillRef>
-          <a:effectRef idx="2">
-            <a:schemeClr val="accent1"/>
-          </a:effectRef>
-          <a:fontRef idx="minor">
-            <a:schemeClr val="lt1"/>
-          </a:fontRef>
-        </p:style>
-        <p:txBody>
-          <a:bodyPr rtlCol="0" anchor="ctr" wrap="square" lIns="73152" rIns="73152" bIns="36576"/>
-          <a:lstStyle/>
-          <a:p>
-            <a:pPr algn="l">
-              <a:spcAft>
-                <a:spcPts val="200"/>
-              </a:spcAft>
-            </a:pPr>
-            <a:r>
-              <a:rPr sz="1100" i="0" b="1">
-                <a:solidFill>
-                  <a:srgbClr val="0B2E59"/>
-                </a:solidFill>
-                <a:latin typeface="Segoe UI"/>
-              </a:rPr>
-              <a:t>Text-only reference</a:t>
-            </a:r>
-          </a:p>
-          <a:p>
-            <a:pPr algn="l">
-              <a:spcAft>
-                <a:spcPts val="200"/>
-              </a:spcAft>
-            </a:pPr>
-            <a:r>
-              <a:rPr sz="1100" i="0" b="0">
-                <a:solidFill>
-                  <a:srgbClr val="333333"/>
-                </a:solidFill>
-                <a:latin typeface="Segoe UI"/>
-              </a:rPr>
-              <a:t>Follow the current Navigator steps and copy blocks. The older screenshot is awaiting a live refresh.</a:t>
-            </a:r>
-          </a:p>
-        </p:txBody>
-      </p:sp>
+        </p:spPr>
+      </p:pic>
       <p:sp>
         <p:nvSpPr>
           <p:cNvPr id="31" name="TextBox 30"/>

--- a/deck/LiveWell-Lab-Flow.pptx
+++ b/deck/LiveWell-Lab-Flow.pptx
@@ -659,7 +659,7 @@
           <a:lstStyle/>
           <a:p>
             <a:r>
-              <a:t>Fabric step: Population evidence with Fabric IQ. Objective, read from the lab page: An agent that acts: personalise on governed data, take real actions with a human in the loop, delegate to specialists, and route each kind of question to the right tool. Walk the steps on the left; the screenshot shows what success looks like. Close by reading the 'You learned' line aloud: that Fabric IQ adds governed population evidence to a personal answer, as long as the question sent to it stays aggregate.</a:t>
+              <a:t>Fabric step: Population evidence with Fabric IQ. Objective, read from the lab page: Use governed cohort evidence when guidance alone cannot answer a question, and inspect exactly what information the coach sends to Fabric. Walk the steps on the left; the screenshot shows what success looks like. Close by reading the 'You learned' line aloud: to inspect outgoing arguments and distinguish descriptive cohort evidence from individual advice.</a:t>
             </a:r>
           </a:p>
         </p:txBody>
@@ -729,7 +729,7 @@
           <a:lstStyle/>
           <a:p>
             <a:r>
-              <a:t>Lab 4: Multi-agent &amp; Hosted deploy. Objective, read from the lab page: From playground to production: the same agent behind two doors (portal for people, endpoint for systems), governed by the same policy. Walk the steps on the left; the screenshot shows what success looks like. Close by reading the 'You learned' line aloud: what changes when an agent moves from playground to endpoint: RBAC, policy attachment, versioning and operational traces.</a:t>
+              <a:t>Lab 4: Multi-agent &amp; Hosted deploy. Objective, read from the lab page: Choose between one agent, sequential and hand-off workflows; use execution evidence to explain the route, then inspect the pre-deployed hosted team. Walk the steps on the left; the screenshot shows what success looks like. Close by reading the 'You learned' line aloud: to distinguish a workflow diagram from execution evidence, and hosting from orchestration.</a:t>
             </a:r>
           </a:p>
         </p:txBody>
@@ -799,7 +799,7 @@
           <a:lstStyle/>
           <a:p>
             <a:r>
-              <a:t>Three ways to run the same specialists. Sequential: the code fixes the order with SequentialBuilder, so the route never varies. Hand-off: HandoffBuilder gives each agent handoff_to_&lt;name&gt; tools; the model chooses the route, and the run stops when Activity has answered. Hosted: hosted-agent-example/main.py builds the sequential team, turns it into one agent and serves it with ResponsesHostServer; Foundry adds an agent identity and applies the guardrail to every call. The text_only middleware passes earlier turns as plain text so no agent replays another's tool calls.</a:t>
+              <a:t>Start with one agent when sufficient; more agents add latency, cost and failure points. The two prepared workflows compare fixed stages with model-selected hand-offs among permitted targets. This hand-off example stops at Activity rather than merging JSON, so it is not an equal-output speed comparison. Use DevUI outputs and hand-off calls as execution evidence; its Tools panel does not show Foundry-hosted MCP calls. Hosting changes where a workflow runs, not its orchestration pattern. The hosted sequential team is already deployed.</a:t>
             </a:r>
           </a:p>
         </p:txBody>
@@ -869,7 +869,7 @@
           <a:lstStyle/>
           <a:p>
             <a:r>
-              <a:t>Bridge: Two IQs, one agent. Objective, read from the lab page: Know when to reach for Foundry IQ (documents and knowledge) versus Fabric IQ (governed business data and ontology), and how to connect them. Walk the steps on the left; the screenshot shows what success looks like. Close by reading the 'You learned' line aloud: how to choose the right grounding path before adding tools to an agent.</a:t>
+              <a:t>Bridge: Two IQs, one agent. Objective, read from the lab page: Know when to reach for Foundry IQ (documents and knowledge) versus Fabric IQ (governed business data and ontology), and how to connect them. Walk the steps on the left; the screenshot shows what success looks like. Close by reading the 'You learned' line aloud: to choose the grounding path and inspect its evidence before adding more tools.</a:t>
             </a:r>
           </a:p>
         </p:txBody>
@@ -1499,7 +1499,7 @@
           <a:lstStyle/>
           <a:p>
             <a:r>
-              <a:t>Lab 0: Setup &amp; first agent. Objective, read from the lab page: A Foundry agent is a model plus instructions, and instructions alone can make it safe; every answer leaves a trace you can inspect. Walk the steps on the left; the screenshot shows what success looks like. Close by reading the 'You learned' line aloud: that a Foundry agent starts as model + instructions, and that every answer leaves a trace with the model, the instructions and the token counts.</a:t>
+              <a:t>Lab 0: Setup &amp; first agent. Objective, read from the lab page: Configure an agent's intended behaviour with a model and instructions, then inspect a response and its trace; one refusal is not proof of safety. Walk the steps on the left; the screenshot shows what success looks like. Close by reading the 'You learned' line aloud: that instructions specify intended behaviour; a successful example is evidence, not a safety guarantee.</a:t>
             </a:r>
           </a:p>
         </p:txBody>
@@ -1569,7 +1569,7 @@
           <a:lstStyle/>
           <a:p>
             <a:r>
-              <a:t>Lab 1: Agents &amp; Knowledge: Foundry IQ. Objective, read from the lab page: Ground every answer in curated knowledge with verifiable citations, never invent a source, and return machine-routable JSON. Walk the steps on the left; the screenshot shows what success looks like. Close by reading the 'You learned' line aloud: that retrieval is useful only when the agent is required to cite real sources and admit when the corpus is silent.</a:t>
+              <a:t>Lab 1: Agents &amp; Knowledge: Foundry IQ. Objective, read from the lab page: Ground every answer in curated knowledge with verifiable citations, never invent a source, and return machine-routable JSON. Walk the steps on the left; the screenshot shows what success looks like. Close by reading the 'You learned' line aloud: to verify a retrieved passage against a claim, not treat a citation id or JSON as proof of correctness.</a:t>
             </a:r>
           </a:p>
         </p:txBody>
@@ -1639,7 +1639,7 @@
           <a:lstStyle/>
           <a:p>
             <a:r>
-              <a:t>Lab 2: Guardrails, Evaluations &amp; Tracing. Objective, read from the lab page: Safety is measured, not assumed: apply guardrails, prove behaviour with evaluators, and make every decision auditable in a trace. Walk the steps on the left; the screenshot shows what success looks like. Close by reading the 'You learned' line aloud: that each safety layer (Prompt Shields, thresholds, blocklists, instructions) catches different things, that a stricter guardrail has a cost, and that guardrails, evaluator results and traces are the evidence for safe deployment.</a:t>
+              <a:t>Lab 2: Guardrails, Evaluations &amp; Tracing. Objective, read from the lab page: Compare safety layers using traces and prepared evaluation results; distinguish a refusal, a block, an over-block and an unavailable verdict. Walk the steps on the left; the screenshot shows what success looks like. Close by reading the 'You learned' line aloud: to distinguish observed behaviour from a judge verdict, and a failed verdict from no verdict.</a:t>
             </a:r>
           </a:p>
         </p:txBody>
@@ -1709,7 +1709,7 @@
           <a:lstStyle/>
           <a:p>
             <a:r>
-              <a:t>These are the expected outcomes from the Lab 2 page; confirm them live because content-safety severity is probabilistic. Left column is the platform default guardrail, right is the shared custom policy plus the safety instruction block. Point out three things: Prompt Shields catches the injected flyer in both; the custom policy turns two answers into blocks; and the benign dose reminder is the price of a stricter blocklist. Facilitator demo: demos/guardrail-matrix.py runs the same seven prompts on gpt-5-mini and gpt-4.1-mini, with and without the custom guardrail, and can push the rows into a Foundry evaluation for a side-by-side compare.</a:t>
+              <a:t>These are historical examples, not guaranteed classifications. Read the actual trace. Left column is the platform default guardrail, right is the shared custom policy plus the safety instruction block. Point out three things: Prompt Shields catches the injected flyer in both; the custom policy turns two answers into blocks; and the benign dose reminder is the price of a stricter blocklist. Facilitator demo: demos/guardrail-matrix.py runs the same seven prompts on gpt-5-mini and gpt-4.1-mini, with and without the custom guardrail, and can push the rows into a Foundry evaluation for a side-by-side compare.</a:t>
             </a:r>
           </a:p>
         </p:txBody>
@@ -5156,11 +5156,11 @@
             <a:avLst/>
           </a:prstGeom>
           <a:solidFill>
-            <a:srgbClr val="D7E2EA"/>
+            <a:srgbClr val="0B2E59"/>
           </a:solidFill>
           <a:ln w="12700">
             <a:solidFill>
-              <a:srgbClr val="D7E2EA"/>
+              <a:srgbClr val="0B2E59"/>
             </a:solidFill>
           </a:ln>
         </p:spPr>
@@ -5185,7 +5185,7 @@
             <a:pPr algn="ctr">
               <a:defRPr sz="1300" b="1">
                 <a:solidFill>
-                  <a:srgbClr val="0B2E59"/>
+                  <a:srgbClr val="FFFFFF"/>
                 </a:solidFill>
                 <a:latin typeface="Segoe UI"/>
               </a:defRPr>
@@ -5577,7 +5577,7 @@
               </a:defRPr>
             </a:pPr>
             <a:r>
-              <a:t>40 min</a:t>
+              <a:t>30 min</a:t>
             </a:r>
           </a:p>
         </p:txBody>
@@ -5646,7 +5646,7 @@
         <p:spPr>
           <a:xfrm>
             <a:off x="2463393" y="896112"/>
-            <a:ext cx="490118" cy="274320"/>
+            <a:ext cx="2046427" cy="274320"/>
           </a:xfrm>
           <a:prstGeom prst="roundRect">
             <a:avLst/>
@@ -5687,7 +5687,7 @@
               </a:defRPr>
             </a:pPr>
             <a:r>
-              <a:t>L300</a:t>
+              <a:t>L200 · optional detail L300</a:t>
             </a:r>
           </a:p>
         </p:txBody>
@@ -5700,7 +5700,7 @@
         </p:nvSpPr>
         <p:spPr>
           <a:xfrm>
-            <a:off x="3026664" y="896112"/>
+            <a:off x="4582972" y="896112"/>
             <a:ext cx="1505102" cy="274320"/>
           </a:xfrm>
           <a:prstGeom prst="roundRect">
@@ -5755,7 +5755,7 @@
         </p:nvSpPr>
         <p:spPr>
           <a:xfrm>
-            <a:off x="4604918" y="896112"/>
+            <a:off x="6161227" y="896112"/>
             <a:ext cx="2046427" cy="274320"/>
           </a:xfrm>
           <a:prstGeom prst="roundRect">
@@ -5950,7 +5950,7 @@
                 </a:solidFill>
                 <a:latin typeface="Segoe UI"/>
               </a:rPr>
-              <a:t>The sign-up is a real write, so it needs his approval.</a:t>
+              <a:t>A write to temporary synthetic records still needs explicit approval; it is not a real booking.</a:t>
             </a:r>
           </a:p>
         </p:txBody>
@@ -6618,7 +6618,7 @@
                 </a:solidFill>
                 <a:latin typeface="Segoe UI"/>
               </a:rPr>
-              <a:t>: indoor options near Woodlands, then </a:t>
+              <a:t>: inspect arguments, then </a:t>
             </a:r>
             <a:r>
               <a:rPr sz="1080" i="0" b="1">
@@ -6627,7 +6627,7 @@
                 </a:solidFill>
                 <a:latin typeface="Segoe UI"/>
               </a:rPr>
-              <a:t>Approve</a:t>
+              <a:t>Approve once</a:t>
             </a:r>
             <a:r>
               <a:rPr sz="1080" i="0" b="0">
@@ -6636,7 +6636,25 @@
                 </a:solidFill>
                 <a:latin typeface="Segoe UI"/>
               </a:rPr>
-              <a:t> the sign-up.</a:t>
+              <a:t> or </a:t>
+            </a:r>
+            <a:r>
+              <a:rPr sz="1080" i="0" b="1">
+                <a:solidFill>
+                  <a:srgbClr val="333333"/>
+                </a:solidFill>
+                <a:latin typeface="Segoe UI"/>
+              </a:rPr>
+              <a:t>Deny</a:t>
+            </a:r>
+            <a:r>
+              <a:rPr sz="1080" i="0" b="0">
+                <a:solidFill>
+                  <a:srgbClr val="333333"/>
+                </a:solidFill>
+                <a:latin typeface="Segoe UI"/>
+              </a:rPr>
+              <a:t>.</a:t>
             </a:r>
           </a:p>
         </p:txBody>
@@ -6730,7 +6748,7 @@
                 </a:solidFill>
                 <a:latin typeface="Segoe UI"/>
               </a:rPr>
-              <a:t>State a preference, start a new chat and check the coach remembers it.</a:t>
+              <a:t>State a preference; in a new chat inspect stored/search evidence, not only plausible wording.</a:t>
             </a:r>
           </a:p>
         </p:txBody>
@@ -7141,7 +7159,7 @@
               </a:defRPr>
             </a:pPr>
             <a:r>
-              <a:t>15 min</a:t>
+              <a:t>10 min</a:t>
             </a:r>
           </a:p>
         </p:txBody>
@@ -7210,7 +7228,7 @@
         <p:spPr>
           <a:xfrm>
             <a:off x="2598724" y="896112"/>
-            <a:ext cx="490118" cy="274320"/>
+            <a:ext cx="1166774" cy="274320"/>
           </a:xfrm>
           <a:prstGeom prst="roundRect">
             <a:avLst/>
@@ -7251,7 +7269,7 @@
               </a:defRPr>
             </a:pPr>
             <a:r>
-              <a:t>L300</a:t>
+              <a:t>L200 · preview</a:t>
             </a:r>
           </a:p>
         </p:txBody>
@@ -7264,7 +7282,7 @@
         </p:nvSpPr>
         <p:spPr>
           <a:xfrm>
-            <a:off x="3161995" y="896112"/>
+            <a:off x="3838651" y="896112"/>
             <a:ext cx="1505102" cy="274320"/>
           </a:xfrm>
           <a:prstGeom prst="roundRect">
@@ -7319,7 +7337,7 @@
         </p:nvSpPr>
         <p:spPr>
           <a:xfrm>
-            <a:off x="4740249" y="896112"/>
+            <a:off x="5416905" y="896112"/>
             <a:ext cx="2046427" cy="274320"/>
           </a:xfrm>
           <a:prstGeom prst="roundRect">
@@ -7434,7 +7452,7 @@
                 </a:solidFill>
                 <a:latin typeface="Segoe UI"/>
               </a:rPr>
-              <a:t>Add governed population evidence to a personal answer, without sending personal data.</a:t>
+              <a:t>Use governed cohort evidence when guidance alone cannot answer a question, and inspect exactly what information the coach sends to Fabric.</a:t>
             </a:r>
           </a:p>
         </p:txBody>
@@ -7647,13 +7665,22 @@
               </a:spcAft>
             </a:pPr>
             <a:r>
+              <a:rPr sz="1080" i="0" b="0">
+                <a:solidFill>
+                  <a:srgbClr val="333333"/>
+                </a:solidFill>
+                <a:latin typeface="Segoe UI"/>
+              </a:rPr>
+              <a:t>Only when ready: attach </a:t>
+            </a:r>
+            <a:r>
               <a:rPr sz="1080" i="0" b="1">
                 <a:solidFill>
                   <a:srgbClr val="333333"/>
                 </a:solidFill>
                 <a:latin typeface="Segoe UI"/>
               </a:rPr>
-              <a:t>Tools → Add → Fabric IQ</a:t>
+              <a:t>Configured → livewell-fabric-resident360</a:t>
             </a:r>
             <a:r>
               <a:rPr sz="1080" i="0" b="0">
@@ -7662,25 +7689,7 @@
                 </a:solidFill>
                 <a:latin typeface="Segoe UI"/>
               </a:rPr>
-              <a:t> (preview) and pick </a:t>
-            </a:r>
-            <a:r>
-              <a:rPr sz="1080" i="0" b="0">
-                <a:solidFill>
-                  <a:srgbClr val="0B2E59"/>
-                </a:solidFill>
-                <a:latin typeface="Consolas"/>
-              </a:rPr>
-              <a:t>Resident360 Ontology Agent</a:t>
-            </a:r>
-            <a:r>
-              <a:rPr sz="1080" i="0" b="0">
-                <a:solidFill>
-                  <a:srgbClr val="333333"/>
-                </a:solidFill>
-                <a:latin typeface="Segoe UI"/>
-              </a:rPr>
-              <a:t>.</a:t>
+              <a:t>. Skip if paused.</a:t>
             </a:r>
           </a:p>
         </p:txBody>
@@ -7886,25 +7895,7 @@
                 </a:solidFill>
                 <a:latin typeface="Segoe UI"/>
               </a:rPr>
-              <a:t>As Rahim, send </a:t>
-            </a:r>
-            <a:r>
-              <a:rPr sz="1080" i="0" b="0">
-                <a:solidFill>
-                  <a:srgbClr val="0B2E59"/>
-                </a:solidFill>
-                <a:latin typeface="Consolas"/>
-              </a:rPr>
-              <a:t>lab3_programme_fit</a:t>
-            </a:r>
-            <a:r>
-              <a:rPr sz="1080" i="0" b="0">
-                <a:solidFill>
-                  <a:srgbClr val="333333"/>
-                </a:solidFill>
-                <a:latin typeface="Segoe UI"/>
-              </a:rPr>
-              <a:t>: profile → Fabric IQ (age band only) → activities, then approve.</a:t>
+              <a:t>Inspect the outgoing aggregate question and returned evidence; no personal record goes to Fabric.</a:t>
             </a:r>
           </a:p>
         </p:txBody>
@@ -8196,7 +8187,7 @@
                 </a:solidFill>
                 <a:latin typeface="Segoe UI"/>
               </a:rPr>
-              <a:t>Programme fit: Rahim's profile, then his age band's retention from Fabric, then a nearby activity.</a:t>
+              <a:t>Optional captured programme-fit example. The guided core compares an aggregate question with guide retrieval.</a:t>
             </a:r>
           </a:p>
         </p:txBody>
@@ -8262,7 +8253,7 @@
                 </a:solidFill>
                 <a:latin typeface="Segoe UI"/>
               </a:rPr>
-              <a:t> that Fabric IQ adds governed population evidence to a personal answer, as long as the question sent to it stays aggregate.</a:t>
+              <a:t> to inspect outgoing arguments and distinguish descriptive cohort evidence from individual advice.</a:t>
             </a:r>
           </a:p>
         </p:txBody>
@@ -8486,11 +8477,11 @@
             <a:avLst/>
           </a:prstGeom>
           <a:solidFill>
-            <a:srgbClr val="D7E2EA"/>
+            <a:srgbClr val="0B2E59"/>
           </a:solidFill>
           <a:ln w="12700">
             <a:solidFill>
-              <a:srgbClr val="D7E2EA"/>
+              <a:srgbClr val="0B2E59"/>
             </a:solidFill>
           </a:ln>
         </p:spPr>
@@ -8515,7 +8506,7 @@
             <a:pPr algn="ctr">
               <a:defRPr sz="1000" b="1">
                 <a:solidFill>
-                  <a:srgbClr val="0B2E59"/>
+                  <a:srgbClr val="FFFFFF"/>
                 </a:solidFill>
                 <a:latin typeface="Segoe UI"/>
               </a:defRPr>
@@ -8535,7 +8526,7 @@
         <p:spPr>
           <a:xfrm>
             <a:off x="1155801" y="896112"/>
-            <a:ext cx="1911095" cy="274320"/>
+            <a:ext cx="2587752" cy="274320"/>
           </a:xfrm>
           <a:prstGeom prst="roundRect">
             <a:avLst/>
@@ -8576,7 +8567,7 @@
               </a:defRPr>
             </a:pPr>
             <a:r>
-              <a:t>Part C · facilitator demo</a:t>
+              <a:t>1:15 comparison · 5:15 hosted proof</a:t>
             </a:r>
           </a:p>
         </p:txBody>
@@ -8589,8 +8580,8 @@
         </p:nvSpPr>
         <p:spPr>
           <a:xfrm>
-            <a:off x="3140049" y="896112"/>
-            <a:ext cx="490118" cy="274320"/>
+            <a:off x="3816705" y="896112"/>
+            <a:ext cx="1911095" cy="274320"/>
           </a:xfrm>
           <a:prstGeom prst="roundRect">
             <a:avLst/>
@@ -8631,7 +8622,7 @@
               </a:defRPr>
             </a:pPr>
             <a:r>
-              <a:t>L300</a:t>
+              <a:t>L200 · optional code L300</a:t>
             </a:r>
           </a:p>
         </p:txBody>
@@ -8644,8 +8635,8 @@
         </p:nvSpPr>
         <p:spPr>
           <a:xfrm>
-            <a:off x="3703320" y="896112"/>
-            <a:ext cx="2249424" cy="274320"/>
+            <a:off x="5800953" y="896112"/>
+            <a:ext cx="2452420" cy="274320"/>
           </a:xfrm>
           <a:prstGeom prst="roundRect">
             <a:avLst/>
@@ -8686,7 +8677,7 @@
               </a:defRPr>
             </a:pPr>
             <a:r>
-              <a:t>Facilitator-led · Builder code</a:t>
+              <a:t>Shared browser · optional Builder</a:t>
             </a:r>
           </a:p>
         </p:txBody>
@@ -8699,7 +8690,7 @@
         </p:nvSpPr>
         <p:spPr>
           <a:xfrm>
-            <a:off x="6025896" y="896112"/>
+            <a:off x="8326526" y="896112"/>
             <a:ext cx="1572768" cy="274320"/>
           </a:xfrm>
           <a:prstGeom prst="roundRect">
@@ -8814,7 +8805,7 @@
                 </a:solidFill>
                 <a:latin typeface="Segoe UI"/>
               </a:rPr>
-              <a:t>From playground to production: the same agent behind two doors (portal for people, endpoint for systems), governed by the same policy.</a:t>
+              <a:t>Choose between one agent, sequential and hand-off workflows; use execution evidence to explain the route, then inspect the pre-deployed hosted team.</a:t>
             </a:r>
           </a:p>
         </p:txBody>
@@ -8894,7 +8885,7 @@
                 </a:solidFill>
                 <a:latin typeface="Segoe UI"/>
               </a:rPr>
-              <a:t>Two specialists answer; one reply comes back.</a:t>
+              <a:t>Same request, different control flow and final answerer.</a:t>
             </a:r>
           </a:p>
         </p:txBody>
@@ -9024,25 +9015,7 @@
                 </a:solidFill>
                 <a:latin typeface="Segoe UI"/>
               </a:rPr>
-              <a:t>The facilitator opens DevUI (</a:t>
-            </a:r>
-            <a:r>
-              <a:rPr sz="1080" i="0" b="0">
-                <a:solidFill>
-                  <a:srgbClr val="0B2E59"/>
-                </a:solidFill>
-                <a:latin typeface="Consolas"/>
-              </a:rPr>
-              <a:t>python demos/lab4-devui.py</a:t>
-            </a:r>
-            <a:r>
-              <a:rPr sz="1080" i="0" b="0">
-                <a:solidFill>
-                  <a:srgbClr val="333333"/>
-                </a:solidFill>
-                <a:latin typeface="Segoe UI"/>
-              </a:rPr>
-              <a:t>) with two workflows.</a:t>
+              <a:t>Click the facilitator's private expiring link: LiveWell sequential opens. No token entry or deployment.</a:t>
             </a:r>
           </a:p>
         </p:txBody>
@@ -9136,7 +9109,7 @@
                 </a:solidFill>
                 <a:latin typeface="Segoe UI"/>
               </a:rPr>
-              <a:t>LiveWell sequential</a:t>
+              <a:t>Predict</a:t>
             </a:r>
             <a:r>
               <a:rPr sz="1080" i="0" b="0">
@@ -9145,7 +9118,25 @@
                 </a:solidFill>
                 <a:latin typeface="Segoe UI"/>
               </a:rPr>
-              <a:t>: Nutrition → Activity → Coach, in a fixed order.</a:t>
+              <a:t> who is needed for </a:t>
+            </a:r>
+            <a:r>
+              <a:rPr sz="1080" i="0" b="0">
+                <a:solidFill>
+                  <a:srgbClr val="0B2E59"/>
+                </a:solidFill>
+                <a:latin typeface="Consolas"/>
+              </a:rPr>
+              <a:t>lab4_week_plan_handoff</a:t>
+            </a:r>
+            <a:r>
+              <a:rPr sz="1080" i="0" b="0">
+                <a:solidFill>
+                  <a:srgbClr val="333333"/>
+                </a:solidFill>
+                <a:latin typeface="Segoe UI"/>
+              </a:rPr>
+              <a:t>, then run each prepared team.</a:t>
             </a:r>
           </a:p>
         </p:txBody>
@@ -9239,7 +9230,7 @@
                 </a:solidFill>
                 <a:latin typeface="Segoe UI"/>
               </a:rPr>
-              <a:t>LiveWell hand-off</a:t>
+              <a:t>Sequential</a:t>
             </a:r>
             <a:r>
               <a:rPr sz="1080" i="0" b="0">
@@ -9248,7 +9239,25 @@
                 </a:solidFill>
                 <a:latin typeface="Segoe UI"/>
               </a:rPr>
-              <a:t>: the Coach triages and the model picks the route.</a:t>
+              <a:t> ends with Coach-merged JSON; </a:t>
+            </a:r>
+            <a:r>
+              <a:rPr sz="1080" i="0" b="1">
+                <a:solidFill>
+                  <a:srgbClr val="333333"/>
+                </a:solidFill>
+                <a:latin typeface="Segoe UI"/>
+              </a:rPr>
+              <a:t>hand-off</a:t>
+            </a:r>
+            <a:r>
+              <a:rPr sz="1080" i="0" b="0">
+                <a:solidFill>
+                  <a:srgbClr val="333333"/>
+                </a:solidFill>
+                <a:latin typeface="Segoe UI"/>
+              </a:rPr>
+              <a:t> ends with Activity's answer.</a:t>
             </a:r>
           </a:p>
         </p:txBody>
@@ -9342,7 +9351,43 @@
                 </a:solidFill>
                 <a:latin typeface="Segoe UI"/>
               </a:rPr>
-              <a:t>The Programme-Insights specialist answers Mei's question with Fabric IQ.</a:t>
+              <a:t>Inspect </a:t>
+            </a:r>
+            <a:r>
+              <a:rPr sz="1080" i="0" b="1">
+                <a:solidFill>
+                  <a:srgbClr val="333333"/>
+                </a:solidFill>
+                <a:latin typeface="Segoe UI"/>
+              </a:rPr>
+              <a:t>Output</a:t>
+            </a:r>
+            <a:r>
+              <a:rPr sz="1080" i="0" b="0">
+                <a:solidFill>
+                  <a:srgbClr val="333333"/>
+                </a:solidFill>
+                <a:latin typeface="Segoe UI"/>
+              </a:rPr>
+              <a:t> and </a:t>
+            </a:r>
+            <a:r>
+              <a:rPr sz="1080" i="0" b="1">
+                <a:solidFill>
+                  <a:srgbClr val="333333"/>
+                </a:solidFill>
+                <a:latin typeface="Segoe UI"/>
+              </a:rPr>
+              <a:t>Tools</a:t>
+            </a:r>
+            <a:r>
+              <a:rPr sz="1080" i="0" b="0">
+                <a:solidFill>
+                  <a:srgbClr val="333333"/>
+                </a:solidFill>
+                <a:latin typeface="Segoe UI"/>
+              </a:rPr>
+              <a:t>: hand-off calls, not graph edges, prove control transferred.</a:t>
             </a:r>
           </a:p>
         </p:txBody>
@@ -9432,11 +9477,20 @@
             <a:r>
               <a:rPr sz="1080" i="0" b="0">
                 <a:solidFill>
+                  <a:srgbClr val="333333"/>
+                </a:solidFill>
+                <a:latin typeface="Segoe UI"/>
+              </a:rPr>
+              <a:t>Try </a:t>
+            </a:r>
+            <a:r>
+              <a:rPr sz="1080" i="0" b="0">
+                <a:solidFill>
                   <a:srgbClr val="0B2E59"/>
                 </a:solidFill>
                 <a:latin typeface="Consolas"/>
               </a:rPr>
-              <a:t>azd deploy livewell-workshop-hosted</a:t>
+              <a:t>lab4_activity_only</a:t>
             </a:r>
             <a:r>
               <a:rPr sz="1080" i="0" b="0">
@@ -9445,7 +9499,7 @@
                 </a:solidFill>
                 <a:latin typeface="Segoe UI"/>
               </a:rPr>
-              <a:t> puts the sequential team behind an endpoint.</a:t>
+              <a:t>: hand-off should skip Nutrition. Compare routes, not promised speed.</a:t>
             </a:r>
           </a:p>
         </p:txBody>
@@ -9539,7 +9593,7 @@
                 </a:solidFill>
                 <a:latin typeface="Segoe UI"/>
               </a:rPr>
-              <a:t>Smoke-test the endpoint, then compare the hosted trace with the playground trace.</a:t>
+              <a:t>At 5:15 inspect the already-hosted sequential team. Fabric is an optional separate extension.</a:t>
             </a:r>
           </a:p>
         </p:txBody>
@@ -9560,8 +9614,8 @@
         </p:blipFill>
         <p:spPr>
           <a:xfrm>
-            <a:off x="6583679" y="1611072"/>
-            <a:ext cx="5166360" cy="3398111"/>
+            <a:off x="6583680" y="1527733"/>
+            <a:ext cx="5166360" cy="3564788"/>
           </a:xfrm>
           <a:prstGeom prst="rect">
             <a:avLst/>
@@ -9607,7 +9661,7 @@
                 </a:solidFill>
                 <a:latin typeface="Segoe UI"/>
               </a:rPr>
-              <a:t>DevUI hand-off run: each box turns green as that agent finishes; the timeline shows each answer.</a:t>
+              <a:t>Graph ≠ execution. Read outputs and hand-off calls; two calls plus two results make four Tools entries.</a:t>
             </a:r>
           </a:p>
         </p:txBody>
@@ -9673,7 +9727,7 @@
                 </a:solidFill>
                 <a:latin typeface="Segoe UI"/>
               </a:rPr>
-              <a:t> what changes when an agent moves from playground to endpoint: RBAC, policy attachment, versioning and operational traces.</a:t>
+              <a:t> to distinguish a workflow diagram from execution evidence, and hosting from orchestration.</a:t>
             </a:r>
           </a:p>
         </p:txBody>
@@ -9934,7 +9988,7 @@
                 </a:solidFill>
                 <a:latin typeface="Segoe UI"/>
               </a:rPr>
-              <a:t>Sequential</a:t>
+              <a:t>One agent</a:t>
             </a:r>
           </a:p>
           <a:p>
@@ -9950,7 +10004,7 @@
                 </a:solidFill>
                 <a:latin typeface="Segoe UI"/>
               </a:rPr>
-              <a:t>code decides the order</a:t>
+              <a:t>start here when sufficient</a:t>
             </a:r>
           </a:p>
           <a:p>
@@ -9964,27 +10018,9 @@
                 <a:solidFill>
                   <a:srgbClr val="FFFFFF"/>
                 </a:solidFill>
-                <a:latin typeface="Consolas"/>
-              </a:rPr>
-              <a:t>SequentialBuilder</a:t>
-            </a:r>
-            <a:r>
-              <a:rPr sz="950" i="0" b="0">
-                <a:solidFill>
-                  <a:srgbClr val="FFFFFF"/>
-                </a:solidFill>
-                <a:latin typeface="Segoe UI"/>
-              </a:rPr>
-              <a:t> in </a:t>
-            </a:r>
-            <a:r>
-              <a:rPr sz="950" i="0" b="0">
-                <a:solidFill>
-                  <a:srgbClr val="FFFFFF"/>
-                </a:solidFill>
-                <a:latin typeface="Consolas"/>
-              </a:rPr>
-              <a:t>lab4_multiagent.py</a:t>
+                <a:latin typeface="Segoe UI"/>
+              </a:rPr>
+              <a:t>Design choice; no extra lab run</a:t>
             </a:r>
           </a:p>
         </p:txBody>
@@ -10043,7 +10079,7 @@
                 </a:solidFill>
                 <a:latin typeface="Segoe UI"/>
               </a:rPr>
-              <a:t>Request + profile summary</a:t>
+              <a:t>Request</a:t>
             </a:r>
           </a:p>
         </p:txBody>
@@ -10137,7 +10173,7 @@
                 </a:solidFill>
                 <a:latin typeface="Segoe UI"/>
               </a:rPr>
-              <a:t>Nutrition</a:t>
+              <a:t>One agent with tools</a:t>
             </a:r>
           </a:p>
         </p:txBody>
@@ -10231,7 +10267,7 @@
                 </a:solidFill>
                 <a:latin typeface="Segoe UI"/>
               </a:rPr>
-              <a:t>Activity</a:t>
+              <a:t>Retrieve or act</a:t>
             </a:r>
           </a:p>
         </p:txBody>
@@ -10325,7 +10361,7 @@
                 </a:solidFill>
                 <a:latin typeface="Segoe UI"/>
               </a:rPr>
-              <a:t>Coach merges into evidence JSON</a:t>
+              <a:t>One answer</a:t>
             </a:r>
           </a:p>
         </p:txBody>
@@ -10382,7 +10418,7 @@
                 </a:solidFill>
                 <a:latin typeface="Segoe UI"/>
               </a:rPr>
-              <a:t>Hand-off</a:t>
+              <a:t>Sequential</a:t>
             </a:r>
           </a:p>
           <a:p>
@@ -10398,7 +10434,7 @@
                 </a:solidFill>
                 <a:latin typeface="Segoe UI"/>
               </a:rPr>
-              <a:t>the model decides the route</a:t>
+              <a:t>code decides the order</a:t>
             </a:r>
           </a:p>
           <a:p>
@@ -10414,7 +10450,7 @@
                 </a:solidFill>
                 <a:latin typeface="Consolas"/>
               </a:rPr>
-              <a:t>HandoffBuilder</a:t>
+              <a:t>SequentialBuilder</a:t>
             </a:r>
             <a:r>
               <a:rPr sz="950" i="0" b="0">
@@ -10491,7 +10527,7 @@
                 </a:solidFill>
                 <a:latin typeface="Segoe UI"/>
               </a:rPr>
-              <a:t>Request</a:t>
+              <a:t>Request + profile summary</a:t>
             </a:r>
           </a:p>
         </p:txBody>
@@ -10533,46 +10569,7 @@
       </p:cxnSp>
       <p:sp>
         <p:nvSpPr>
-          <p:cNvPr id="18" name="TextBox 17"/>
-          <p:cNvSpPr txBox="1"/>
-          <p:nvPr/>
-        </p:nvSpPr>
-        <p:spPr>
-          <a:xfrm>
-            <a:off x="4416552" y="3639312"/>
-            <a:ext cx="1417320" cy="274320"/>
-          </a:xfrm>
-          <a:prstGeom prst="rect">
-            <a:avLst/>
-          </a:prstGeom>
-          <a:noFill/>
-        </p:spPr>
-        <p:txBody>
-          <a:bodyPr wrap="square" lIns="73152" rIns="73152" bIns="36576" anchor="t">
-            <a:spAutoFit/>
-          </a:bodyPr>
-          <a:lstStyle/>
-          <a:p>
-            <a:pPr algn="ctr">
-              <a:spcAft>
-                <a:spcPts val="200"/>
-              </a:spcAft>
-            </a:pPr>
-            <a:r>
-              <a:rPr sz="850" i="0" b="0">
-                <a:solidFill>
-                  <a:srgbClr val="0B2E59"/>
-                </a:solidFill>
-                <a:latin typeface="Consolas"/>
-              </a:rPr>
-              <a:t>handoff_to_nutrition</a:t>
-            </a:r>
-          </a:p>
-        </p:txBody>
-      </p:sp>
-      <p:sp>
-        <p:nvSpPr>
-          <p:cNvPr id="19" name="Rounded Rectangle 18"/>
+          <p:cNvPr id="18" name="Rounded Rectangle 17"/>
           <p:cNvSpPr/>
           <p:nvPr/>
         </p:nvSpPr>
@@ -10624,14 +10621,14 @@
                 </a:solidFill>
                 <a:latin typeface="Segoe UI"/>
               </a:rPr>
-              <a:t>Coach triages, never answers</a:t>
+              <a:t>Nutrition</a:t>
             </a:r>
           </a:p>
         </p:txBody>
       </p:sp>
       <p:cxnSp>
         <p:nvCxnSpPr>
-          <p:cNvPr id="20" name="Connector 19"/>
+          <p:cNvPr id="19" name="Connector 18"/>
           <p:cNvCxnSpPr/>
           <p:nvPr/>
         </p:nvCxnSpPr>
@@ -10666,46 +10663,7 @@
       </p:cxnSp>
       <p:sp>
         <p:nvSpPr>
-          <p:cNvPr id="21" name="TextBox 20"/>
-          <p:cNvSpPr txBox="1"/>
-          <p:nvPr/>
-        </p:nvSpPr>
-        <p:spPr>
-          <a:xfrm>
-            <a:off x="6702552" y="3639312"/>
-            <a:ext cx="1417320" cy="274320"/>
-          </a:xfrm>
-          <a:prstGeom prst="rect">
-            <a:avLst/>
-          </a:prstGeom>
-          <a:noFill/>
-        </p:spPr>
-        <p:txBody>
-          <a:bodyPr wrap="square" lIns="73152" rIns="73152" bIns="36576" anchor="t">
-            <a:spAutoFit/>
-          </a:bodyPr>
-          <a:lstStyle/>
-          <a:p>
-            <a:pPr algn="ctr">
-              <a:spcAft>
-                <a:spcPts val="200"/>
-              </a:spcAft>
-            </a:pPr>
-            <a:r>
-              <a:rPr sz="850" i="0" b="0">
-                <a:solidFill>
-                  <a:srgbClr val="0B2E59"/>
-                </a:solidFill>
-                <a:latin typeface="Consolas"/>
-              </a:rPr>
-              <a:t>handoff_to_activity</a:t>
-            </a:r>
-          </a:p>
-        </p:txBody>
-      </p:sp>
-      <p:sp>
-        <p:nvSpPr>
-          <p:cNvPr id="22" name="Rounded Rectangle 21"/>
+          <p:cNvPr id="20" name="Rounded Rectangle 19"/>
           <p:cNvSpPr/>
           <p:nvPr/>
         </p:nvSpPr>
@@ -10757,14 +10715,14 @@
                 </a:solidFill>
                 <a:latin typeface="Segoe UI"/>
               </a:rPr>
-              <a:t>Nutrition (1 autonomous turn)</a:t>
+              <a:t>Activity</a:t>
             </a:r>
           </a:p>
         </p:txBody>
       </p:sp>
       <p:cxnSp>
         <p:nvCxnSpPr>
-          <p:cNvPr id="23" name="Connector 22"/>
+          <p:cNvPr id="21" name="Connector 20"/>
           <p:cNvCxnSpPr/>
           <p:nvPr/>
         </p:nvCxnSpPr>
@@ -10799,7 +10757,7 @@
       </p:cxnSp>
       <p:sp>
         <p:nvSpPr>
-          <p:cNvPr id="24" name="Rounded Rectangle 23"/>
+          <p:cNvPr id="22" name="Rounded Rectangle 21"/>
           <p:cNvSpPr/>
           <p:nvPr/>
         </p:nvSpPr>
@@ -10851,14 +10809,14 @@
                 </a:solidFill>
                 <a:latin typeface="Segoe UI"/>
               </a:rPr>
-              <a:t>Activity, then stop</a:t>
-            </a:r>
-          </a:p>
-        </p:txBody>
-      </p:sp>
-      <p:sp>
-        <p:nvSpPr>
-          <p:cNvPr id="25" name="Rectangle 24"/>
+              <a:t>Coach merges into evidence JSON</a:t>
+            </a:r>
+          </a:p>
+        </p:txBody>
+      </p:sp>
+      <p:sp>
+        <p:nvSpPr>
+          <p:cNvPr id="23" name="Rectangle 22"/>
           <p:cNvSpPr/>
           <p:nvPr/>
         </p:nvSpPr>
@@ -10908,7 +10866,7 @@
                 </a:solidFill>
                 <a:latin typeface="Segoe UI"/>
               </a:rPr>
-              <a:t>Hosted</a:t>
+              <a:t>Hand-off</a:t>
             </a:r>
           </a:p>
           <a:p>
@@ -10924,7 +10882,7 @@
                 </a:solidFill>
                 <a:latin typeface="Segoe UI"/>
               </a:rPr>
-              <a:t>same sequential team, behind an endpoint</a:t>
+              <a:t>model selects a permitted route</a:t>
             </a:r>
           </a:p>
           <a:p>
@@ -10940,14 +10898,32 @@
                 </a:solidFill>
                 <a:latin typeface="Consolas"/>
               </a:rPr>
-              <a:t>hosted-agent-example/main.py</a:t>
-            </a:r>
-          </a:p>
-        </p:txBody>
-      </p:sp>
-      <p:sp>
-        <p:nvSpPr>
-          <p:cNvPr id="26" name="Rounded Rectangle 25"/>
+              <a:t>HandoffBuilder</a:t>
+            </a:r>
+            <a:r>
+              <a:rPr sz="950" i="0" b="0">
+                <a:solidFill>
+                  <a:srgbClr val="FFFFFF"/>
+                </a:solidFill>
+                <a:latin typeface="Segoe UI"/>
+              </a:rPr>
+              <a:t> in </a:t>
+            </a:r>
+            <a:r>
+              <a:rPr sz="950" i="0" b="0">
+                <a:solidFill>
+                  <a:srgbClr val="FFFFFF"/>
+                </a:solidFill>
+                <a:latin typeface="Consolas"/>
+              </a:rPr>
+              <a:t>lab4_multiagent.py</a:t>
+            </a:r>
+          </a:p>
+        </p:txBody>
+      </p:sp>
+      <p:sp>
+        <p:nvSpPr>
+          <p:cNvPr id="24" name="Rounded Rectangle 23"/>
           <p:cNvSpPr/>
           <p:nvPr/>
         </p:nvSpPr>
@@ -10995,27 +10971,18 @@
             <a:r>
               <a:rPr sz="1050" i="0" b="0">
                 <a:solidFill>
-                  <a:srgbClr val="0B2E59"/>
-                </a:solidFill>
-                <a:latin typeface="Consolas"/>
-              </a:rPr>
-              <a:t>ResidentProfile</a:t>
-            </a:r>
-            <a:r>
-              <a:rPr sz="1050" i="0" b="0">
-                <a:solidFill>
                   <a:srgbClr val="333333"/>
                 </a:solidFill>
                 <a:latin typeface="Segoe UI"/>
               </a:rPr>
-              <a:t> executor</a:t>
+              <a:t>Request</a:t>
             </a:r>
           </a:p>
         </p:txBody>
       </p:sp>
       <p:cxnSp>
         <p:nvCxnSpPr>
-          <p:cNvPr id="27" name="Connector 26"/>
+          <p:cNvPr id="25" name="Connector 24"/>
           <p:cNvCxnSpPr/>
           <p:nvPr/>
         </p:nvCxnSpPr>
@@ -11050,7 +11017,7 @@
       </p:cxnSp>
       <p:sp>
         <p:nvSpPr>
-          <p:cNvPr id="28" name="Rounded Rectangle 27"/>
+          <p:cNvPr id="26" name="Rounded Rectangle 25"/>
           <p:cNvSpPr/>
           <p:nvPr/>
         </p:nvSpPr>
@@ -11102,23 +11069,14 @@
                 </a:solidFill>
                 <a:latin typeface="Segoe UI"/>
               </a:rPr>
-              <a:t>Sequential team </a:t>
-            </a:r>
-            <a:r>
-              <a:rPr sz="1050" i="0" b="0">
-                <a:solidFill>
-                  <a:srgbClr val="0B2E59"/>
-                </a:solidFill>
-                <a:latin typeface="Consolas"/>
-              </a:rPr>
-              <a:t>.as_agent()</a:t>
+              <a:t>Coach triages</a:t>
             </a:r>
           </a:p>
         </p:txBody>
       </p:sp>
       <p:cxnSp>
         <p:nvCxnSpPr>
-          <p:cNvPr id="29" name="Connector 28"/>
+          <p:cNvPr id="27" name="Connector 26"/>
           <p:cNvCxnSpPr/>
           <p:nvPr/>
         </p:nvCxnSpPr>
@@ -11153,7 +11111,46 @@
       </p:cxnSp>
       <p:sp>
         <p:nvSpPr>
-          <p:cNvPr id="30" name="Rounded Rectangle 29"/>
+          <p:cNvPr id="28" name="TextBox 27"/>
+          <p:cNvSpPr txBox="1"/>
+          <p:nvPr/>
+        </p:nvSpPr>
+        <p:spPr>
+          <a:xfrm>
+            <a:off x="6702552" y="5175504"/>
+            <a:ext cx="1417320" cy="274320"/>
+          </a:xfrm>
+          <a:prstGeom prst="rect">
+            <a:avLst/>
+          </a:prstGeom>
+          <a:noFill/>
+        </p:spPr>
+        <p:txBody>
+          <a:bodyPr wrap="square" lIns="73152" rIns="73152" bIns="36576" anchor="t">
+            <a:spAutoFit/>
+          </a:bodyPr>
+          <a:lstStyle/>
+          <a:p>
+            <a:pPr algn="ctr">
+              <a:spcAft>
+                <a:spcPts val="200"/>
+              </a:spcAft>
+            </a:pPr>
+            <a:r>
+              <a:rPr sz="850" i="0" b="0">
+                <a:solidFill>
+                  <a:srgbClr val="0B2E59"/>
+                </a:solidFill>
+                <a:latin typeface="Consolas"/>
+              </a:rPr>
+              <a:t>handoff_to_nutrition</a:t>
+            </a:r>
+          </a:p>
+        </p:txBody>
+      </p:sp>
+      <p:sp>
+        <p:nvSpPr>
+          <p:cNvPr id="29" name="Rounded Rectangle 28"/>
           <p:cNvSpPr/>
           <p:nvPr/>
         </p:nvSpPr>
@@ -11201,18 +11198,18 @@
             <a:r>
               <a:rPr sz="1050" i="0" b="0">
                 <a:solidFill>
-                  <a:srgbClr val="0B2E59"/>
-                </a:solidFill>
-                <a:latin typeface="Consolas"/>
-              </a:rPr>
-              <a:t>ResponsesHostServer</a:t>
+                  <a:srgbClr val="333333"/>
+                </a:solidFill>
+                <a:latin typeface="Segoe UI"/>
+              </a:rPr>
+              <a:t>Nutrition if needed</a:t>
             </a:r>
           </a:p>
         </p:txBody>
       </p:sp>
       <p:cxnSp>
         <p:nvCxnSpPr>
-          <p:cNvPr id="31" name="Connector 30"/>
+          <p:cNvPr id="30" name="Connector 29"/>
           <p:cNvCxnSpPr/>
           <p:nvPr/>
         </p:nvCxnSpPr>
@@ -11245,6 +11242,45 @@
           </a:fontRef>
         </p:style>
       </p:cxnSp>
+      <p:sp>
+        <p:nvSpPr>
+          <p:cNvPr id="31" name="TextBox 30"/>
+          <p:cNvSpPr txBox="1"/>
+          <p:nvPr/>
+        </p:nvSpPr>
+        <p:spPr>
+          <a:xfrm>
+            <a:off x="8988552" y="5175504"/>
+            <a:ext cx="1417320" cy="274320"/>
+          </a:xfrm>
+          <a:prstGeom prst="rect">
+            <a:avLst/>
+          </a:prstGeom>
+          <a:noFill/>
+        </p:spPr>
+        <p:txBody>
+          <a:bodyPr wrap="square" lIns="73152" rIns="73152" bIns="36576" anchor="t">
+            <a:spAutoFit/>
+          </a:bodyPr>
+          <a:lstStyle/>
+          <a:p>
+            <a:pPr algn="ctr">
+              <a:spcAft>
+                <a:spcPts val="200"/>
+              </a:spcAft>
+            </a:pPr>
+            <a:r>
+              <a:rPr sz="850" i="0" b="0">
+                <a:solidFill>
+                  <a:srgbClr val="0B2E59"/>
+                </a:solidFill>
+                <a:latin typeface="Consolas"/>
+              </a:rPr>
+              <a:t>handoff_to_activity</a:t>
+            </a:r>
+          </a:p>
+        </p:txBody>
+      </p:sp>
       <p:sp>
         <p:nvSpPr>
           <p:cNvPr id="32" name="Rounded Rectangle 31"/>
@@ -11299,16 +11335,7 @@
                 </a:solidFill>
                 <a:latin typeface="Segoe UI"/>
               </a:rPr>
-              <a:t>Foundry: agent identity + </a:t>
-            </a:r>
-            <a:r>
-              <a:rPr sz="1050" i="0" b="0">
-                <a:solidFill>
-                  <a:srgbClr val="0B2E59"/>
-                </a:solidFill>
-                <a:latin typeface="Consolas"/>
-              </a:rPr>
-              <a:t>rai_config</a:t>
+              <a:t>Activity answers; no merge</a:t>
             </a:r>
           </a:p>
         </p:txBody>
@@ -11367,7 +11394,7 @@
                 </a:solidFill>
                 <a:latin typeface="Segoe UI"/>
               </a:rPr>
-              <a:t>Programme-Insights</a:t>
+              <a:t>Hosted proof at 5:15:</a:t>
             </a:r>
             <a:r>
               <a:rPr sz="1100" i="0" b="0">
@@ -11376,61 +11403,25 @@
                 </a:solidFill>
                 <a:latin typeface="Segoe UI"/>
               </a:rPr>
-              <a:t> is a separate prompt agent with the Fabric IQ tool, for Mei's questions. Deploy: </a:t>
+              <a:t> the prepared sequential team adds a profile step, identity and guardrail. Hosting is not a third routing pattern. </a:t>
+            </a:r>
+            <a:r>
+              <a:rPr sz="1100" i="0" b="1">
+                <a:solidFill>
+                  <a:srgbClr val="333333"/>
+                </a:solidFill>
+                <a:latin typeface="Segoe UI"/>
+              </a:rPr>
+              <a:t>Fabric is optional</a:t>
             </a:r>
             <a:r>
               <a:rPr sz="1100" i="0" b="0">
                 <a:solidFill>
-                  <a:srgbClr val="0B2E59"/>
-                </a:solidFill>
-                <a:latin typeface="Consolas"/>
-              </a:rPr>
-              <a:t>azd deploy livewell-workshop-hosted</a:t>
-            </a:r>
-            <a:r>
-              <a:rPr sz="1100" i="0" b="0">
-                <a:solidFill>
                   <a:srgbClr val="333333"/>
                 </a:solidFill>
                 <a:latin typeface="Segoe UI"/>
               </a:rPr>
-              <a:t>; the agent identity gets Foundry User and </a:t>
-            </a:r>
-            <a:r>
-              <a:rPr sz="1100" i="0" b="0">
-                <a:solidFill>
-                  <a:srgbClr val="0B2E59"/>
-                </a:solidFill>
-                <a:latin typeface="Consolas"/>
-              </a:rPr>
-              <a:t>rai_config</a:t>
-            </a:r>
-            <a:r>
-              <a:rPr sz="1100" i="0" b="0">
-                <a:solidFill>
-                  <a:srgbClr val="333333"/>
-                </a:solidFill>
-                <a:latin typeface="Segoe UI"/>
-              </a:rPr>
-              <a:t> attaches </a:t>
-            </a:r>
-            <a:r>
-              <a:rPr sz="1100" i="0" b="0">
-                <a:solidFill>
-                  <a:srgbClr val="0B2E59"/>
-                </a:solidFill>
-                <a:latin typeface="Consolas"/>
-              </a:rPr>
-              <a:t>livewell-guardrails</a:t>
-            </a:r>
-            <a:r>
-              <a:rPr sz="1100" i="0" b="0">
-                <a:solidFill>
-                  <a:srgbClr val="333333"/>
-                </a:solidFill>
-                <a:latin typeface="Segoe UI"/>
-              </a:rPr>
-              <a:t>.</a:t>
+              <a:t> and separate from both DevUI teams.</a:t>
             </a:r>
           </a:p>
         </p:txBody>
@@ -11648,7 +11639,7 @@
         <p:spPr>
           <a:xfrm>
             <a:off x="457200" y="896112"/>
-            <a:ext cx="625449" cy="274320"/>
+            <a:ext cx="557784" cy="274320"/>
           </a:xfrm>
           <a:prstGeom prst="roundRect">
             <a:avLst/>
@@ -11689,7 +11680,7 @@
               </a:defRPr>
             </a:pPr>
             <a:r>
-              <a:t>10 min</a:t>
+              <a:t>8 min</a:t>
             </a:r>
           </a:p>
         </p:txBody>
@@ -11702,7 +11693,7 @@
         </p:nvSpPr>
         <p:spPr>
           <a:xfrm>
-            <a:off x="1155801" y="896112"/>
+            <a:off x="1088136" y="896112"/>
             <a:ext cx="1369771" cy="274320"/>
           </a:xfrm>
           <a:prstGeom prst="roundRect">
@@ -11757,7 +11748,7 @@
         </p:nvSpPr>
         <p:spPr>
           <a:xfrm>
-            <a:off x="2598724" y="896112"/>
+            <a:off x="2531059" y="896112"/>
             <a:ext cx="490118" cy="274320"/>
           </a:xfrm>
           <a:prstGeom prst="roundRect">
@@ -11812,7 +11803,7 @@
         </p:nvSpPr>
         <p:spPr>
           <a:xfrm>
-            <a:off x="3161995" y="896112"/>
+            <a:off x="3094329" y="896112"/>
             <a:ext cx="1234439" cy="274320"/>
           </a:xfrm>
           <a:prstGeom prst="roundRect">
@@ -11867,7 +11858,7 @@
         </p:nvSpPr>
         <p:spPr>
           <a:xfrm>
-            <a:off x="4469587" y="896112"/>
+            <a:off x="4401921" y="896112"/>
             <a:ext cx="1234439" cy="274320"/>
           </a:xfrm>
           <a:prstGeom prst="roundRect">
@@ -12400,7 +12391,7 @@
                 </a:solidFill>
                 <a:latin typeface="Segoe UI"/>
               </a:rPr>
-              <a:t>Decide with the table: documents → Foundry IQ; governed business data → Fabric IQ.</a:t>
+              <a:t>Explain our source choices, not exclusive product capabilities.</a:t>
             </a:r>
           </a:p>
         </p:txBody>
@@ -12494,7 +12485,7 @@
                 </a:solidFill>
                 <a:latin typeface="Segoe UI"/>
               </a:rPr>
-              <a:t>Walk the three Fabric integration paths (all preview).</a:t>
+              <a:t>Ontology context guides source-native SQL, KQL or DAX; the source executes it.</a:t>
             </a:r>
           </a:p>
         </p:txBody>
@@ -12588,7 +12579,7 @@
                 </a:solidFill>
                 <a:latin typeface="Segoe UI"/>
               </a:rPr>
-              <a:t>Send Mei's multi-hop question and show what happened inside Fabric.</a:t>
+              <a:t>Use captured evidence; legacy GQL replay is historical, not current runtime proof.</a:t>
             </a:r>
           </a:p>
         </p:txBody>
@@ -12816,7 +12807,7 @@
                 </a:solidFill>
                 <a:latin typeface="Segoe UI"/>
               </a:rPr>
-              <a:t> how to choose the right grounding path before adding tools to an agent.</a:t>
+              <a:t> to choose the grounding path and inspect its evidence before adding more tools.</a:t>
             </a:r>
           </a:p>
         </p:txBody>
@@ -13210,7 +13201,7 @@
                           </a:solidFill>
                           <a:latin typeface="Segoe UI"/>
                         </a:rPr>
-                        <a:t>A Foundry agent is a model plus instructions, and instructions alone can make it safe; every answer leaves a trace you can inspect</a:t>
+                        <a:t>Configure an agent's intended behaviour with a model and instructions, then inspect a response and its trace; one refusal is not proof of safety</a:t>
                       </a:r>
                     </a:p>
                   </a:txBody>
@@ -13240,7 +13231,7 @@
                           </a:solidFill>
                           <a:latin typeface="Segoe UI"/>
                         </a:rPr>
-                        <a:t>A Foundry agent starts as model + instructions, and that every answer leaves a trace with the model, the instructions and the token counts.</a:t>
+                        <a:t>Instructions specify intended behaviour; a successful example is evidence, not a safety guarantee.</a:t>
                       </a:r>
                     </a:p>
                   </a:txBody>
@@ -13291,7 +13282,7 @@
                           </a:solidFill>
                           <a:latin typeface="Segoe UI"/>
                         </a:rPr>
-                        <a:t>40 min</a:t>
+                        <a:t>35 min</a:t>
                       </a:r>
                     </a:p>
                   </a:txBody>
@@ -13351,7 +13342,7 @@
                           </a:solidFill>
                           <a:latin typeface="Segoe UI"/>
                         </a:rPr>
-                        <a:t>Retrieval is useful only when the agent is required to cite real sources and admit when the corpus is silent.</a:t>
+                        <a:t>To verify a retrieved passage against a claim, not treat a citation id or JSON as proof of correctness.</a:t>
                       </a:r>
                     </a:p>
                   </a:txBody>
@@ -13402,7 +13393,7 @@
                           </a:solidFill>
                           <a:latin typeface="Segoe UI"/>
                         </a:rPr>
-                        <a:t>40 min</a:t>
+                        <a:t>30 min</a:t>
                       </a:r>
                     </a:p>
                   </a:txBody>
@@ -13432,7 +13423,7 @@
                           </a:solidFill>
                           <a:latin typeface="Segoe UI"/>
                         </a:rPr>
-                        <a:t>Safety is measured, not assumed: apply guardrails, prove behaviour with evaluators, and make every decision auditable in a trace</a:t>
+                        <a:t>Compare safety layers using traces and prepared evaluation results; distinguish a refusal, a block, an over-block and an unavailable verdict</a:t>
                       </a:r>
                     </a:p>
                   </a:txBody>
@@ -13462,7 +13453,7 @@
                           </a:solidFill>
                           <a:latin typeface="Segoe UI"/>
                         </a:rPr>
-                        <a:t>Each safety layer (Prompt Shields, thresholds, blocklists, instructions) catches different things, that a stricter guardrail has a cost, and that guardrails, evaluator results and traces are the evidence for safe deployment.</a:t>
+                        <a:t>To distinguish observed behaviour from a judge verdict, and a failed verdict from no verdict.</a:t>
                       </a:r>
                     </a:p>
                   </a:txBody>
@@ -13513,7 +13504,7 @@
                           </a:solidFill>
                           <a:latin typeface="Segoe UI"/>
                         </a:rPr>
-                        <a:t>40 min</a:t>
+                        <a:t>30 min</a:t>
                       </a:r>
                     </a:p>
                   </a:txBody>
@@ -13624,7 +13615,7 @@
                           </a:solidFill>
                           <a:latin typeface="Segoe UI"/>
                         </a:rPr>
-                        <a:t>15 min</a:t>
+                        <a:t>10 min</a:t>
                       </a:r>
                     </a:p>
                   </a:txBody>
@@ -13654,7 +13645,7 @@
                           </a:solidFill>
                           <a:latin typeface="Segoe UI"/>
                         </a:rPr>
-                        <a:t>Continues Lab 3: add governed population evidence to a personal answer, without sending personal data</a:t>
+                        <a:t>Continues Lab 3: use governed cohort evidence when guidance alone cannot answer a question, and inspect exactly what information the coach sends to Fabric</a:t>
                       </a:r>
                     </a:p>
                   </a:txBody>
@@ -13684,7 +13675,7 @@
                           </a:solidFill>
                           <a:latin typeface="Segoe UI"/>
                         </a:rPr>
-                        <a:t>Fabric IQ adds governed population evidence to a personal answer, as long as the question sent to it stays aggregate.</a:t>
+                        <a:t>To inspect outgoing arguments and distinguish descriptive cohort evidence from individual advice.</a:t>
                       </a:r>
                     </a:p>
                   </a:txBody>
@@ -13765,7 +13756,7 @@
                           </a:solidFill>
                           <a:latin typeface="Segoe UI"/>
                         </a:rPr>
-                        <a:t>From playground to production: the same agent behind two doors (portal for people, endpoint for systems), governed by the same policy</a:t>
+                        <a:t>Choose between one agent, sequential and hand-off workflows; use execution evidence to explain the route, then inspect the pre-deployed hosted team</a:t>
                       </a:r>
                     </a:p>
                   </a:txBody>
@@ -13795,7 +13786,7 @@
                           </a:solidFill>
                           <a:latin typeface="Segoe UI"/>
                         </a:rPr>
-                        <a:t>What changes when an agent moves from playground to endpoint: RBAC, policy attachment, versioning and operational traces.</a:t>
+                        <a:t>To distinguish a workflow diagram from execution evidence, and hosting from orchestration.</a:t>
                       </a:r>
                     </a:p>
                   </a:txBody>
@@ -13846,7 +13837,7 @@
                           </a:solidFill>
                           <a:latin typeface="Segoe UI"/>
                         </a:rPr>
-                        <a:t>10 min</a:t>
+                        <a:t>8 min</a:t>
                       </a:r>
                     </a:p>
                   </a:txBody>
@@ -13906,7 +13897,7 @@
                           </a:solidFill>
                           <a:latin typeface="Segoe UI"/>
                         </a:rPr>
-                        <a:t>How to choose the right grounding path before adding tools to an agent.</a:t>
+                        <a:t>To choose the grounding path and inspect its evidence before adding more tools.</a:t>
                       </a:r>
                     </a:p>
                   </a:txBody>
@@ -17965,7 +17956,7 @@
                 </a:solidFill>
                 <a:latin typeface="Segoe UI"/>
               </a:rPr>
-              <a:t>A Foundry agent is a model plus instructions; instructions alone already make it safer.</a:t>
+              <a:t>Configure intended behaviour, then inspect evidence; one refusal is not a safety guarantee.</a:t>
             </a:r>
           </a:p>
         </p:txBody>
@@ -18940,7 +18931,7 @@
                 </a:solidFill>
                 <a:latin typeface="Segoe UI"/>
               </a:rPr>
-              <a:t>Model + instructions</a:t>
+              <a:t>Configure intended behaviour</a:t>
             </a:r>
           </a:p>
           <a:p>
@@ -18956,7 +18947,7 @@
                 </a:solidFill>
                 <a:latin typeface="Segoe UI"/>
               </a:rPr>
-              <a:t>every answer leaves a trace</a:t>
+              <a:t>inspect one execution</a:t>
             </a:r>
           </a:p>
         </p:txBody>
@@ -19135,7 +19126,7 @@
               </a:defRPr>
             </a:pPr>
             <a:r>
-              <a:t>40 min</a:t>
+              <a:t>35 min</a:t>
             </a:r>
           </a:p>
         </p:txBody>
@@ -19389,7 +19380,7 @@
               </a:defRPr>
             </a:pPr>
             <a:r>
-              <a:t>40 min</a:t>
+              <a:t>30 min</a:t>
             </a:r>
           </a:p>
         </p:txBody>
@@ -19448,7 +19439,7 @@
                 </a:solidFill>
                 <a:latin typeface="Segoe UI"/>
               </a:rPr>
-              <a:t>Guardrails, traces, evaluations</a:t>
+              <a:t>Compare controls and trade-offs</a:t>
             </a:r>
           </a:p>
           <a:p>
@@ -19464,7 +19455,7 @@
                 </a:solidFill>
                 <a:latin typeface="Segoe UI"/>
               </a:rPr>
-              <a:t>evidence that it is safe</a:t>
+              <a:t>distinguish errors from verdicts</a:t>
             </a:r>
           </a:p>
         </p:txBody>
@@ -19643,7 +19634,7 @@
               </a:defRPr>
             </a:pPr>
             <a:r>
-              <a:t>40 min</a:t>
+              <a:t>30 min</a:t>
             </a:r>
           </a:p>
         </p:txBody>
@@ -19897,7 +19888,7 @@
               </a:defRPr>
             </a:pPr>
             <a:r>
-              <a:t>15 min</a:t>
+              <a:t>10 min</a:t>
             </a:r>
           </a:p>
         </p:txBody>
@@ -20083,7 +20074,7 @@
               </a:defRPr>
             </a:pPr>
             <a:r>
-              <a:t>Part C · facilitator demo</a:t>
+              <a:t>1:15 comparison · 5:15 hosted proof</a:t>
             </a:r>
           </a:p>
         </p:txBody>
@@ -20103,11 +20094,11 @@
             <a:avLst/>
           </a:prstGeom>
           <a:solidFill>
-            <a:srgbClr val="D7E2EA"/>
+            <a:srgbClr val="0B2E59"/>
           </a:solidFill>
           <a:ln w="12700">
             <a:solidFill>
-              <a:srgbClr val="D7E2EA"/>
+              <a:srgbClr val="0B2E59"/>
             </a:solidFill>
           </a:ln>
         </p:spPr>
@@ -20132,7 +20123,7 @@
             <a:pPr algn="ctr">
               <a:defRPr sz="1200" b="1">
                 <a:solidFill>
-                  <a:srgbClr val="0B2E59"/>
+                  <a:srgbClr val="FFFFFF"/>
                 </a:solidFill>
                 <a:latin typeface="Segoe UI"/>
               </a:defRPr>
@@ -20145,7 +20136,7 @@
             <a:pPr algn="ctr">
               <a:defRPr sz="1200" b="1">
                 <a:solidFill>
-                  <a:srgbClr val="0B2E59"/>
+                  <a:srgbClr val="FFFFFF"/>
                 </a:solidFill>
                 <a:latin typeface="Segoe UI"/>
               </a:defRPr>
@@ -20171,11 +20162,11 @@
             <a:avLst/>
           </a:prstGeom>
           <a:solidFill>
-            <a:srgbClr val="F4F8FA"/>
+            <a:srgbClr val="E7F4F6"/>
           </a:solidFill>
           <a:ln w="12700">
             <a:solidFill>
-              <a:srgbClr val="D7E2EA"/>
+              <a:srgbClr val="0F7C8C"/>
             </a:solidFill>
           </a:ln>
           <a:effectLst/>
@@ -20210,7 +20201,7 @@
                 </a:solidFill>
                 <a:latin typeface="Segoe UI"/>
               </a:rPr>
-              <a:t>Specialist team + hosted endpoint</a:t>
+              <a:t>Choose a pattern</a:t>
             </a:r>
           </a:p>
           <a:p>
@@ -20226,7 +20217,7 @@
                 </a:solidFill>
                 <a:latin typeface="Segoe UI"/>
               </a:rPr>
-              <a:t>same policy behind two doors</a:t>
+              <a:t>explain the execution evidence</a:t>
             </a:r>
           </a:p>
         </p:txBody>
@@ -20405,7 +20396,7 @@
               </a:defRPr>
             </a:pPr>
             <a:r>
-              <a:t>10 min</a:t>
+              <a:t>8 min</a:t>
             </a:r>
           </a:p>
         </p:txBody>
@@ -21100,11 +21091,11 @@
             <a:avLst/>
           </a:prstGeom>
           <a:solidFill>
-            <a:srgbClr val="D7E2EA"/>
+            <a:srgbClr val="0B2E59"/>
           </a:solidFill>
           <a:ln w="12700">
             <a:solidFill>
-              <a:srgbClr val="D7E2EA"/>
+              <a:srgbClr val="0B2E59"/>
             </a:solidFill>
           </a:ln>
         </p:spPr>
@@ -21129,13 +21120,13 @@
             <a:pPr algn="ctr">
               <a:defRPr sz="1200" b="1">
                 <a:solidFill>
-                  <a:srgbClr val="0B2E59"/>
+                  <a:srgbClr val="FFFFFF"/>
                 </a:solidFill>
                 <a:latin typeface="Segoe UI"/>
               </a:defRPr>
             </a:pPr>
             <a:r>
-              <a:t>Lab 4 · Team + endpoint</a:t>
+              <a:t>Lab 4 · Choose a route</a:t>
             </a:r>
           </a:p>
         </p:txBody>
@@ -21155,11 +21146,11 @@
             <a:avLst/>
           </a:prstGeom>
           <a:solidFill>
-            <a:srgbClr val="F4F8FA"/>
+            <a:srgbClr val="E7F4F6"/>
           </a:solidFill>
           <a:ln w="12700">
             <a:solidFill>
-              <a:srgbClr val="D7E2EA"/>
+              <a:srgbClr val="0F7C8C"/>
             </a:solidFill>
           </a:ln>
           <a:effectLst/>
@@ -21194,43 +21185,7 @@
                 </a:solidFill>
                 <a:latin typeface="Segoe UI"/>
               </a:rPr>
-              <a:t>Nutrition, Activity and Coach as a sequential or hand-off team; hosted endpoint </a:t>
-            </a:r>
-            <a:r>
-              <a:rPr sz="1150" i="0" b="0">
-                <a:solidFill>
-                  <a:srgbClr val="0B2E59"/>
-                </a:solidFill>
-                <a:latin typeface="Consolas"/>
-              </a:rPr>
-              <a:t>livewell-workshop-hosted</a:t>
-            </a:r>
-            <a:r>
-              <a:rPr sz="1150" i="0" b="0">
-                <a:solidFill>
-                  <a:srgbClr val="333333"/>
-                </a:solidFill>
-                <a:latin typeface="Segoe UI"/>
-              </a:rPr>
-              <a:t> with </a:t>
-            </a:r>
-            <a:r>
-              <a:rPr sz="1150" i="0" b="0">
-                <a:solidFill>
-                  <a:srgbClr val="0B2E59"/>
-                </a:solidFill>
-                <a:latin typeface="Consolas"/>
-              </a:rPr>
-              <a:t>rai_config</a:t>
-            </a:r>
-            <a:r>
-              <a:rPr sz="1150" i="0" b="0">
-                <a:solidFill>
-                  <a:srgbClr val="333333"/>
-                </a:solidFill>
-                <a:latin typeface="Segoe UI"/>
-              </a:rPr>
-              <a:t>.</a:t>
+              <a:t>Compare prebuilt sequential and hand-off teams in DevUI; inspect the already-hosted sequential team. No participant provisioning.</a:t>
             </a:r>
           </a:p>
         </p:txBody>
@@ -25342,7 +25297,7 @@
                 </a:solidFill>
                 <a:latin typeface="Segoe UI"/>
               </a:rPr>
-              <a:t>A Foundry agent is a model plus instructions, and instructions alone can make it safe; every answer leaves a trace you can inspect.</a:t>
+              <a:t>Configure an agent's intended behaviour with a model and instructions, then inspect a response and its trace; one refusal is not proof of safety.</a:t>
             </a:r>
           </a:p>
         </p:txBody>
@@ -26184,25 +26139,7 @@
                 </a:solidFill>
                 <a:latin typeface="Segoe UI"/>
               </a:rPr>
-              <a:t>Open the trace: one model call, no tools, the </a:t>
-            </a:r>
-            <a:r>
-              <a:rPr sz="1080" i="0" b="0">
-                <a:solidFill>
-                  <a:srgbClr val="0B2E59"/>
-                </a:solidFill>
-                <a:latin typeface="Consolas"/>
-              </a:rPr>
-              <a:t>base</a:t>
-            </a:r>
-            <a:r>
-              <a:rPr sz="1080" i="0" b="0">
-                <a:solidFill>
-                  <a:srgbClr val="333333"/>
-                </a:solidFill>
-                <a:latin typeface="Segoe UI"/>
-              </a:rPr>
-              <a:t> block and the token counts.</a:t>
+              <a:t>Inspect the model call and instructions; one refusal does not prove comprehensive safety.</a:t>
             </a:r>
           </a:p>
         </p:txBody>
@@ -26354,7 +26291,7 @@
                 </a:solidFill>
                 <a:latin typeface="Segoe UI"/>
               </a:rPr>
-              <a:t> that a Foundry agent starts as model + instructions, and that every answer leaves a trace with the model, the instructions and the token counts.</a:t>
+              <a:t> that instructions specify intended behaviour; a successful example is evidence, not a safety guarantee.</a:t>
             </a:r>
           </a:p>
         </p:txBody>
@@ -26613,7 +26550,7 @@
               </a:defRPr>
             </a:pPr>
             <a:r>
-              <a:t>40 min</a:t>
+              <a:t>35 min</a:t>
             </a:r>
           </a:p>
         </p:txBody>
@@ -27524,7 +27461,7 @@
                 </a:solidFill>
                 <a:latin typeface="Segoe UI"/>
               </a:rPr>
-              <a:t>: the answer cites at least one guide.</a:t>
+              <a:t>: open a retrieved passage and connect it to an answer claim.</a:t>
             </a:r>
           </a:p>
         </p:txBody>
@@ -27882,7 +27819,7 @@
                 </a:solidFill>
                 <a:latin typeface="Segoe UI"/>
               </a:rPr>
-              <a:t> that retrieval is useful only when the agent is required to cite real sources and admit when the corpus is silent.</a:t>
+              <a:t> to verify a retrieved passage against a claim, not treat a citation id or JSON as proof of correctness.</a:t>
             </a:r>
           </a:p>
         </p:txBody>
@@ -28141,7 +28078,7 @@
               </a:defRPr>
             </a:pPr>
             <a:r>
-              <a:t>40 min</a:t>
+              <a:t>30 min</a:t>
             </a:r>
           </a:p>
         </p:txBody>
@@ -28210,7 +28147,7 @@
         <p:spPr>
           <a:xfrm>
             <a:off x="2463393" y="896112"/>
-            <a:ext cx="490118" cy="274320"/>
+            <a:ext cx="2046427" cy="274320"/>
           </a:xfrm>
           <a:prstGeom prst="roundRect">
             <a:avLst/>
@@ -28251,7 +28188,7 @@
               </a:defRPr>
             </a:pPr>
             <a:r>
-              <a:t>L300</a:t>
+              <a:t>L200 · optional detail L300</a:t>
             </a:r>
           </a:p>
         </p:txBody>
@@ -28264,7 +28201,7 @@
         </p:nvSpPr>
         <p:spPr>
           <a:xfrm>
-            <a:off x="3026664" y="896112"/>
+            <a:off x="4582972" y="896112"/>
             <a:ext cx="1505102" cy="274320"/>
           </a:xfrm>
           <a:prstGeom prst="roundRect">
@@ -28319,7 +28256,7 @@
         </p:nvSpPr>
         <p:spPr>
           <a:xfrm>
-            <a:off x="4604918" y="896112"/>
+            <a:off x="6161227" y="896112"/>
             <a:ext cx="1572768" cy="274320"/>
           </a:xfrm>
           <a:prstGeom prst="roundRect">
@@ -28434,7 +28371,7 @@
                 </a:solidFill>
                 <a:latin typeface="Segoe UI"/>
               </a:rPr>
-              <a:t>Safety is measured, not assumed: apply guardrails, prove behaviour with evaluators, and make every decision auditable in a trace.</a:t>
+              <a:t>Compare safety layers using traces and prepared evaluation results; distinguish a refusal, a block, an over-block and an unavailable verdict.</a:t>
             </a:r>
           </a:p>
         </p:txBody>
@@ -28756,7 +28693,7 @@
                 </a:solidFill>
                 <a:latin typeface="Segoe UI"/>
               </a:rPr>
-              <a:t>Note who stops each prompt: the model, Prompt Shields, or nobody (skip meals is only annotated).</a:t>
+              <a:t>Identify refusal, block or annotation from the actual trace; outcomes can vary.</a:t>
             </a:r>
           </a:p>
         </p:txBody>
@@ -29092,7 +29029,7 @@
                 </a:solidFill>
                 <a:latin typeface="Segoe UI"/>
               </a:rPr>
-              <a:t>Re-run the ladder: four outcomes change, including one benign false positive.</a:t>
+              <a:t>Re-run unchanged prompts; inspect useful controls and benign over-blocking.</a:t>
             </a:r>
           </a:p>
         </p:txBody>
@@ -29186,7 +29123,7 @@
                 </a:solidFill>
                 <a:latin typeface="Segoe UI"/>
               </a:rPr>
-              <a:t>Open a blocked and an allowed trace; read the facilitator's prepared evaluation and compare the versions (look only).</a:t>
+              <a:t>Read same-model default/custom demo evaluations: pass, fail and not scored stay separate.</a:t>
             </a:r>
           </a:p>
         </p:txBody>
@@ -29355,25 +29292,7 @@
                 </a:solidFill>
                 <a:latin typeface="Segoe UI"/>
               </a:rPr>
-              <a:t>Same question, two guardrails: the medication blocklist in </a:t>
-            </a:r>
-            <a:r>
-              <a:rPr sz="950" i="1" b="0">
-                <a:solidFill>
-                  <a:srgbClr val="0B2E59"/>
-                </a:solidFill>
-                <a:latin typeface="Consolas"/>
-              </a:rPr>
-              <a:t>livewell-guardrails</a:t>
-            </a:r>
-            <a:r>
-              <a:rPr sz="950" i="1" b="0">
-                <a:solidFill>
-                  <a:srgbClr val="333333"/>
-                </a:solidFill>
-                <a:latin typeface="Segoe UI"/>
-              </a:rPr>
-              <a:t> stops it before the model sees it.</a:t>
+              <a:t>Captured example: a model refusal versus an input block. Your trace establishes which layer acted.</a:t>
             </a:r>
           </a:p>
         </p:txBody>
@@ -29439,7 +29358,7 @@
                 </a:solidFill>
                 <a:latin typeface="Segoe UI"/>
               </a:rPr>
-              <a:t> that each safety layer (Prompt Shields, thresholds, blocklists, instructions) catches different things, that a stricter guardrail has a cost, and that guardrails, evaluator results and traces are the evidence for safe deployment.</a:t>
+              <a:t> to distinguish observed behaviour from a judge verdict, and a failed verdict from no verdict.</a:t>
             </a:r>
           </a:p>
         </p:txBody>
@@ -29536,7 +29455,7 @@
               </a:defRPr>
             </a:pPr>
             <a:r>
-              <a:t>Lab 2 · The guardrail ladder: which layer catches what</a:t>
+              <a:t>Lab 2 · Captured ladder examples</a:t>
             </a:r>
           </a:p>
         </p:txBody>
@@ -31145,56 +31064,11 @@
             <a:r>
               <a:rPr sz="1100" i="0" b="0">
                 <a:solidFill>
-                  <a:srgbClr val="0B2E59"/>
-                </a:solidFill>
-                <a:latin typeface="Consolas"/>
-              </a:rPr>
-              <a:t>demos/guardrail-matrix.py</a:t>
-            </a:r>
-            <a:r>
-              <a:rPr sz="1100" i="0" b="0">
-                <a:solidFill>
                   <a:srgbClr val="333333"/>
                 </a:solidFill>
                 <a:latin typeface="Segoe UI"/>
               </a:rPr>
-              <a:t>: </a:t>
-            </a:r>
-            <a:r>
-              <a:rPr sz="1100" i="0" b="0">
-                <a:solidFill>
-                  <a:srgbClr val="0B2E59"/>
-                </a:solidFill>
-                <a:latin typeface="Consolas"/>
-              </a:rPr>
-              <a:t>gpt-5-mini</a:t>
-            </a:r>
-            <a:r>
-              <a:rPr sz="1100" i="0" b="0">
-                <a:solidFill>
-                  <a:srgbClr val="333333"/>
-                </a:solidFill>
-                <a:latin typeface="Segoe UI"/>
-              </a:rPr>
-              <a:t> vs </a:t>
-            </a:r>
-            <a:r>
-              <a:rPr sz="1100" i="0" b="0">
-                <a:solidFill>
-                  <a:srgbClr val="0B2E59"/>
-                </a:solidFill>
-                <a:latin typeface="Consolas"/>
-              </a:rPr>
-              <a:t>gpt-4.1-mini</a:t>
-            </a:r>
-            <a:r>
-              <a:rPr sz="1100" i="0" b="0">
-                <a:solidFill>
-                  <a:srgbClr val="333333"/>
-                </a:solidFill>
-                <a:latin typeface="Segoe UI"/>
-              </a:rPr>
-              <a:t>, default vs custom. Blocks go from 1 of 7 to 4 of 7.</a:t>
+              <a:t>Same-model default/custom demo runs. Keep pass, fail and not scored separate; inspect a judge error before treating it as an unsafe verdict.</a:t>
             </a:r>
           </a:p>
         </p:txBody>
